--- a/Pregrado/Creatividad y pensamiento innovador/Clases/Sesion 02 - Creatividadinnovación en I+D · Design Thinking y técnicas/Presentacion.pptx
+++ b/Pregrado/Creatividad y pensamiento innovador/Clases/Sesion 02 - Creatividadinnovación en I+D · Design Thinking y técnicas/Presentacion.pptx
@@ -3369,41 +3369,6 @@
           </a:p>
         </p:txBody>
       </p:sp>
-      <p:sp>
-        <p:nvSpPr>
-          <p:cNvPr id="7" name="TextBox 6"/>
-          <p:cNvSpPr txBox="1"/>
-          <p:nvPr/>
-        </p:nvSpPr>
-        <p:spPr>
-          <a:xfrm>
-            <a:off x="2194560" y="6446520"/>
-            <a:ext cx="5943600" cy="274320"/>
-          </a:xfrm>
-          <a:prstGeom prst="rect">
-            <a:avLst/>
-          </a:prstGeom>
-          <a:noFill/>
-        </p:spPr>
-        <p:txBody>
-          <a:bodyPr wrap="square" anchor="t" lIns="0" rIns="0" tIns="0" bIns="0">
-            <a:spAutoFit/>
-          </a:bodyPr>
-          <a:lstStyle/>
-          <a:p>
-            <a:pPr algn="l"/>
-            <a:r>
-              <a:rPr sz="1000" b="1" i="0">
-                <a:solidFill>
-                  <a:srgbClr val="8F989D"/>
-                </a:solidFill>
-                <a:latin typeface="Calibri"/>
-              </a:rPr>
-              <a:t>Inicio 5:10 pm</a:t>
-            </a:r>
-          </a:p>
-        </p:txBody>
-      </p:sp>
     </p:spTree>
   </p:cSld>
   <p:clrMapOvr>
@@ -3774,41 +3739,6 @@
         </p:nvSpPr>
         <p:spPr>
           <a:xfrm>
-            <a:off x="2194560" y="6446520"/>
-            <a:ext cx="5943600" cy="274320"/>
-          </a:xfrm>
-          <a:prstGeom prst="rect">
-            <a:avLst/>
-          </a:prstGeom>
-          <a:noFill/>
-        </p:spPr>
-        <p:txBody>
-          <a:bodyPr wrap="square" anchor="t" lIns="0" rIns="0" tIns="0" bIns="0">
-            <a:spAutoFit/>
-          </a:bodyPr>
-          <a:lstStyle/>
-          <a:p>
-            <a:pPr algn="l"/>
-            <a:r>
-              <a:rPr sz="1000" b="1" i="0">
-                <a:solidFill>
-                  <a:srgbClr val="8F989D"/>
-                </a:solidFill>
-                <a:latin typeface="Calibri"/>
-              </a:rPr>
-              <a:t>Inicio 5:10 pm</a:t>
-            </a:r>
-          </a:p>
-        </p:txBody>
-      </p:sp>
-      <p:sp>
-        <p:nvSpPr>
-          <p:cNvPr id="6" name="TextBox 5"/>
-          <p:cNvSpPr txBox="1"/>
-          <p:nvPr/>
-        </p:nvSpPr>
-        <p:spPr>
-          <a:xfrm>
             <a:off x="11094415" y="6446520"/>
             <a:ext cx="548640" cy="274320"/>
           </a:xfrm>
@@ -4063,41 +3993,6 @@
         </p:nvSpPr>
         <p:spPr>
           <a:xfrm>
-            <a:off x="2194560" y="6446520"/>
-            <a:ext cx="5943600" cy="274320"/>
-          </a:xfrm>
-          <a:prstGeom prst="rect">
-            <a:avLst/>
-          </a:prstGeom>
-          <a:noFill/>
-        </p:spPr>
-        <p:txBody>
-          <a:bodyPr wrap="square" anchor="t" lIns="0" rIns="0" tIns="0" bIns="0">
-            <a:spAutoFit/>
-          </a:bodyPr>
-          <a:lstStyle/>
-          <a:p>
-            <a:pPr algn="l"/>
-            <a:r>
-              <a:rPr sz="1000" b="1" i="0">
-                <a:solidFill>
-                  <a:srgbClr val="8F989D"/>
-                </a:solidFill>
-                <a:latin typeface="Calibri"/>
-              </a:rPr>
-              <a:t>Inicio 5:10 pm</a:t>
-            </a:r>
-          </a:p>
-        </p:txBody>
-      </p:sp>
-      <p:sp>
-        <p:nvSpPr>
-          <p:cNvPr id="6" name="TextBox 5"/>
-          <p:cNvSpPr txBox="1"/>
-          <p:nvPr/>
-        </p:nvSpPr>
-        <p:spPr>
-          <a:xfrm>
             <a:off x="11094415" y="6446520"/>
             <a:ext cx="548640" cy="274320"/>
           </a:xfrm>
@@ -4576,41 +4471,6 @@
         </p:nvSpPr>
         <p:spPr>
           <a:xfrm>
-            <a:off x="2194560" y="6446520"/>
-            <a:ext cx="5943600" cy="274320"/>
-          </a:xfrm>
-          <a:prstGeom prst="rect">
-            <a:avLst/>
-          </a:prstGeom>
-          <a:noFill/>
-        </p:spPr>
-        <p:txBody>
-          <a:bodyPr wrap="square" anchor="t" lIns="0" rIns="0" tIns="0" bIns="0">
-            <a:spAutoFit/>
-          </a:bodyPr>
-          <a:lstStyle/>
-          <a:p>
-            <a:pPr algn="l"/>
-            <a:r>
-              <a:rPr sz="1000" b="1" i="0">
-                <a:solidFill>
-                  <a:srgbClr val="8F989D"/>
-                </a:solidFill>
-                <a:latin typeface="Calibri"/>
-              </a:rPr>
-              <a:t>Inicio 5:10 pm</a:t>
-            </a:r>
-          </a:p>
-        </p:txBody>
-      </p:sp>
-      <p:sp>
-        <p:nvSpPr>
-          <p:cNvPr id="6" name="TextBox 5"/>
-          <p:cNvSpPr txBox="1"/>
-          <p:nvPr/>
-        </p:nvSpPr>
-        <p:spPr>
-          <a:xfrm>
             <a:off x="11094415" y="6446520"/>
             <a:ext cx="548640" cy="274320"/>
           </a:xfrm>
@@ -4640,7 +4500,7 @@
       </p:sp>
       <p:sp>
         <p:nvSpPr>
-          <p:cNvPr id="7" name="TextBox 6"/>
+          <p:cNvPr id="6" name="TextBox 5"/>
           <p:cNvSpPr txBox="1"/>
           <p:nvPr/>
         </p:nvSpPr>
@@ -5504,41 +5364,6 @@
         </p:nvSpPr>
         <p:spPr>
           <a:xfrm>
-            <a:off x="2194560" y="6446520"/>
-            <a:ext cx="5943600" cy="274320"/>
-          </a:xfrm>
-          <a:prstGeom prst="rect">
-            <a:avLst/>
-          </a:prstGeom>
-          <a:noFill/>
-        </p:spPr>
-        <p:txBody>
-          <a:bodyPr wrap="square" anchor="t" lIns="0" rIns="0" tIns="0" bIns="0">
-            <a:spAutoFit/>
-          </a:bodyPr>
-          <a:lstStyle/>
-          <a:p>
-            <a:pPr algn="l"/>
-            <a:r>
-              <a:rPr sz="1000" b="1" i="0">
-                <a:solidFill>
-                  <a:srgbClr val="8F989D"/>
-                </a:solidFill>
-                <a:latin typeface="Calibri"/>
-              </a:rPr>
-              <a:t>Inicio 5:10 pm</a:t>
-            </a:r>
-          </a:p>
-        </p:txBody>
-      </p:sp>
-      <p:sp>
-        <p:nvSpPr>
-          <p:cNvPr id="7" name="TextBox 6"/>
-          <p:cNvSpPr txBox="1"/>
-          <p:nvPr/>
-        </p:nvSpPr>
-        <p:spPr>
-          <a:xfrm>
             <a:off x="11094415" y="6446520"/>
             <a:ext cx="548640" cy="274320"/>
           </a:xfrm>
@@ -5990,41 +5815,6 @@
         </p:nvSpPr>
         <p:spPr>
           <a:xfrm>
-            <a:off x="2194560" y="6446520"/>
-            <a:ext cx="5943600" cy="274320"/>
-          </a:xfrm>
-          <a:prstGeom prst="rect">
-            <a:avLst/>
-          </a:prstGeom>
-          <a:noFill/>
-        </p:spPr>
-        <p:txBody>
-          <a:bodyPr wrap="square" anchor="t" lIns="0" rIns="0" tIns="0" bIns="0">
-            <a:spAutoFit/>
-          </a:bodyPr>
-          <a:lstStyle/>
-          <a:p>
-            <a:pPr algn="l"/>
-            <a:r>
-              <a:rPr sz="1000" b="1" i="0">
-                <a:solidFill>
-                  <a:srgbClr val="8F989D"/>
-                </a:solidFill>
-                <a:latin typeface="Calibri"/>
-              </a:rPr>
-              <a:t>Inicio 5:10 pm</a:t>
-            </a:r>
-          </a:p>
-        </p:txBody>
-      </p:sp>
-      <p:sp>
-        <p:nvSpPr>
-          <p:cNvPr id="6" name="TextBox 5"/>
-          <p:cNvSpPr txBox="1"/>
-          <p:nvPr/>
-        </p:nvSpPr>
-        <p:spPr>
-          <a:xfrm>
             <a:off x="11094415" y="6446520"/>
             <a:ext cx="548640" cy="274320"/>
           </a:xfrm>
@@ -6528,41 +6318,6 @@
         </p:nvSpPr>
         <p:spPr>
           <a:xfrm>
-            <a:off x="2194560" y="6446520"/>
-            <a:ext cx="5943600" cy="274320"/>
-          </a:xfrm>
-          <a:prstGeom prst="rect">
-            <a:avLst/>
-          </a:prstGeom>
-          <a:noFill/>
-        </p:spPr>
-        <p:txBody>
-          <a:bodyPr wrap="square" anchor="t" lIns="0" rIns="0" tIns="0" bIns="0">
-            <a:spAutoFit/>
-          </a:bodyPr>
-          <a:lstStyle/>
-          <a:p>
-            <a:pPr algn="l"/>
-            <a:r>
-              <a:rPr sz="1000" b="1" i="0">
-                <a:solidFill>
-                  <a:srgbClr val="8F989D"/>
-                </a:solidFill>
-                <a:latin typeface="Calibri"/>
-              </a:rPr>
-              <a:t>Inicio 5:10 pm</a:t>
-            </a:r>
-          </a:p>
-        </p:txBody>
-      </p:sp>
-      <p:sp>
-        <p:nvSpPr>
-          <p:cNvPr id="11" name="TextBox 10"/>
-          <p:cNvSpPr txBox="1"/>
-          <p:nvPr/>
-        </p:nvSpPr>
-        <p:spPr>
-          <a:xfrm>
             <a:off x="11094415" y="6446520"/>
             <a:ext cx="548640" cy="274320"/>
           </a:xfrm>
@@ -7012,41 +6767,6 @@
         </p:nvSpPr>
         <p:spPr>
           <a:xfrm>
-            <a:off x="2194560" y="6446520"/>
-            <a:ext cx="5943600" cy="274320"/>
-          </a:xfrm>
-          <a:prstGeom prst="rect">
-            <a:avLst/>
-          </a:prstGeom>
-          <a:noFill/>
-        </p:spPr>
-        <p:txBody>
-          <a:bodyPr wrap="square" anchor="t" lIns="0" rIns="0" tIns="0" bIns="0">
-            <a:spAutoFit/>
-          </a:bodyPr>
-          <a:lstStyle/>
-          <a:p>
-            <a:pPr algn="l"/>
-            <a:r>
-              <a:rPr sz="1000" b="1" i="0">
-                <a:solidFill>
-                  <a:srgbClr val="8F989D"/>
-                </a:solidFill>
-                <a:latin typeface="Calibri"/>
-              </a:rPr>
-              <a:t>Inicio 5:10 pm</a:t>
-            </a:r>
-          </a:p>
-        </p:txBody>
-      </p:sp>
-      <p:sp>
-        <p:nvSpPr>
-          <p:cNvPr id="11" name="TextBox 10"/>
-          <p:cNvSpPr txBox="1"/>
-          <p:nvPr/>
-        </p:nvSpPr>
-        <p:spPr>
-          <a:xfrm>
             <a:off x="11094415" y="6446520"/>
             <a:ext cx="548640" cy="274320"/>
           </a:xfrm>
@@ -7606,41 +7326,6 @@
         </p:nvSpPr>
         <p:spPr>
           <a:xfrm>
-            <a:off x="2194560" y="6446520"/>
-            <a:ext cx="5943600" cy="274320"/>
-          </a:xfrm>
-          <a:prstGeom prst="rect">
-            <a:avLst/>
-          </a:prstGeom>
-          <a:noFill/>
-        </p:spPr>
-        <p:txBody>
-          <a:bodyPr wrap="square" anchor="t" lIns="0" rIns="0" tIns="0" bIns="0">
-            <a:spAutoFit/>
-          </a:bodyPr>
-          <a:lstStyle/>
-          <a:p>
-            <a:pPr algn="l"/>
-            <a:r>
-              <a:rPr sz="1000" b="1" i="0">
-                <a:solidFill>
-                  <a:srgbClr val="8F989D"/>
-                </a:solidFill>
-                <a:latin typeface="Calibri"/>
-              </a:rPr>
-              <a:t>Inicio 5:10 pm</a:t>
-            </a:r>
-          </a:p>
-        </p:txBody>
-      </p:sp>
-      <p:sp>
-        <p:nvSpPr>
-          <p:cNvPr id="6" name="TextBox 5"/>
-          <p:cNvSpPr txBox="1"/>
-          <p:nvPr/>
-        </p:nvSpPr>
-        <p:spPr>
-          <a:xfrm>
             <a:off x="11094415" y="6446520"/>
             <a:ext cx="548640" cy="274320"/>
           </a:xfrm>
@@ -7670,7 +7355,7 @@
       </p:sp>
       <p:sp>
         <p:nvSpPr>
-          <p:cNvPr id="7" name="TextBox 6"/>
+          <p:cNvPr id="6" name="TextBox 5"/>
           <p:cNvSpPr txBox="1"/>
           <p:nvPr/>
         </p:nvSpPr>
@@ -8272,41 +7957,6 @@
         </p:nvSpPr>
         <p:spPr>
           <a:xfrm>
-            <a:off x="2194560" y="6446520"/>
-            <a:ext cx="5943600" cy="274320"/>
-          </a:xfrm>
-          <a:prstGeom prst="rect">
-            <a:avLst/>
-          </a:prstGeom>
-          <a:noFill/>
-        </p:spPr>
-        <p:txBody>
-          <a:bodyPr wrap="square" anchor="t" lIns="0" rIns="0" tIns="0" bIns="0">
-            <a:spAutoFit/>
-          </a:bodyPr>
-          <a:lstStyle/>
-          <a:p>
-            <a:pPr algn="l"/>
-            <a:r>
-              <a:rPr sz="1000" b="1" i="0">
-                <a:solidFill>
-                  <a:srgbClr val="8F989D"/>
-                </a:solidFill>
-                <a:latin typeface="Calibri"/>
-              </a:rPr>
-              <a:t>Inicio 5:10 pm</a:t>
-            </a:r>
-          </a:p>
-        </p:txBody>
-      </p:sp>
-      <p:sp>
-        <p:nvSpPr>
-          <p:cNvPr id="6" name="TextBox 5"/>
-          <p:cNvSpPr txBox="1"/>
-          <p:nvPr/>
-        </p:nvSpPr>
-        <p:spPr>
-          <a:xfrm>
             <a:off x="11094415" y="6446520"/>
             <a:ext cx="548640" cy="274320"/>
           </a:xfrm>
@@ -8336,7 +7986,7 @@
       </p:sp>
       <p:sp>
         <p:nvSpPr>
-          <p:cNvPr id="7" name="TextBox 6"/>
+          <p:cNvPr id="6" name="TextBox 5"/>
           <p:cNvSpPr txBox="1"/>
           <p:nvPr/>
         </p:nvSpPr>
@@ -8846,41 +8496,6 @@
         </p:nvSpPr>
         <p:spPr>
           <a:xfrm>
-            <a:off x="2194560" y="6446520"/>
-            <a:ext cx="5943600" cy="274320"/>
-          </a:xfrm>
-          <a:prstGeom prst="rect">
-            <a:avLst/>
-          </a:prstGeom>
-          <a:noFill/>
-        </p:spPr>
-        <p:txBody>
-          <a:bodyPr wrap="square" anchor="t" lIns="0" rIns="0" tIns="0" bIns="0">
-            <a:spAutoFit/>
-          </a:bodyPr>
-          <a:lstStyle/>
-          <a:p>
-            <a:pPr algn="l"/>
-            <a:r>
-              <a:rPr sz="1000" b="1" i="0">
-                <a:solidFill>
-                  <a:srgbClr val="8F989D"/>
-                </a:solidFill>
-                <a:latin typeface="Calibri"/>
-              </a:rPr>
-              <a:t>Inicio 5:10 pm</a:t>
-            </a:r>
-          </a:p>
-        </p:txBody>
-      </p:sp>
-      <p:sp>
-        <p:nvSpPr>
-          <p:cNvPr id="6" name="TextBox 5"/>
-          <p:cNvSpPr txBox="1"/>
-          <p:nvPr/>
-        </p:nvSpPr>
-        <p:spPr>
-          <a:xfrm>
             <a:off x="11094415" y="6446520"/>
             <a:ext cx="548640" cy="274320"/>
           </a:xfrm>
@@ -9280,41 +8895,6 @@
         </p:nvSpPr>
         <p:spPr>
           <a:xfrm>
-            <a:off x="2194560" y="6446520"/>
-            <a:ext cx="5943600" cy="274320"/>
-          </a:xfrm>
-          <a:prstGeom prst="rect">
-            <a:avLst/>
-          </a:prstGeom>
-          <a:noFill/>
-        </p:spPr>
-        <p:txBody>
-          <a:bodyPr wrap="square" anchor="t" lIns="0" rIns="0" tIns="0" bIns="0">
-            <a:spAutoFit/>
-          </a:bodyPr>
-          <a:lstStyle/>
-          <a:p>
-            <a:pPr algn="l"/>
-            <a:r>
-              <a:rPr sz="1000" b="1" i="0">
-                <a:solidFill>
-                  <a:srgbClr val="8F989D"/>
-                </a:solidFill>
-                <a:latin typeface="Calibri"/>
-              </a:rPr>
-              <a:t>Inicio 5:10 pm</a:t>
-            </a:r>
-          </a:p>
-        </p:txBody>
-      </p:sp>
-      <p:sp>
-        <p:nvSpPr>
-          <p:cNvPr id="6" name="TextBox 5"/>
-          <p:cNvSpPr txBox="1"/>
-          <p:nvPr/>
-        </p:nvSpPr>
-        <p:spPr>
-          <a:xfrm>
             <a:off x="11094415" y="6446520"/>
             <a:ext cx="548640" cy="274320"/>
           </a:xfrm>
@@ -9344,7 +8924,7 @@
       </p:sp>
       <p:sp>
         <p:nvSpPr>
-          <p:cNvPr id="7" name="TextBox 6"/>
+          <p:cNvPr id="6" name="TextBox 5"/>
           <p:cNvSpPr txBox="1"/>
           <p:nvPr/>
         </p:nvSpPr>
@@ -9836,41 +9416,6 @@
         </p:nvSpPr>
         <p:spPr>
           <a:xfrm>
-            <a:off x="2194560" y="6446520"/>
-            <a:ext cx="5943600" cy="274320"/>
-          </a:xfrm>
-          <a:prstGeom prst="rect">
-            <a:avLst/>
-          </a:prstGeom>
-          <a:noFill/>
-        </p:spPr>
-        <p:txBody>
-          <a:bodyPr wrap="square" anchor="t" lIns="0" rIns="0" tIns="0" bIns="0">
-            <a:spAutoFit/>
-          </a:bodyPr>
-          <a:lstStyle/>
-          <a:p>
-            <a:pPr algn="l"/>
-            <a:r>
-              <a:rPr sz="1000" b="1" i="0">
-                <a:solidFill>
-                  <a:srgbClr val="8F989D"/>
-                </a:solidFill>
-                <a:latin typeface="Calibri"/>
-              </a:rPr>
-              <a:t>Inicio 5:10 pm</a:t>
-            </a:r>
-          </a:p>
-        </p:txBody>
-      </p:sp>
-      <p:sp>
-        <p:nvSpPr>
-          <p:cNvPr id="6" name="TextBox 5"/>
-          <p:cNvSpPr txBox="1"/>
-          <p:nvPr/>
-        </p:nvSpPr>
-        <p:spPr>
-          <a:xfrm>
             <a:off x="11094415" y="6446520"/>
             <a:ext cx="548640" cy="274320"/>
           </a:xfrm>
@@ -10086,41 +9631,6 @@
         </p:nvSpPr>
         <p:spPr>
           <a:xfrm>
-            <a:off x="2194560" y="6446520"/>
-            <a:ext cx="5943600" cy="274320"/>
-          </a:xfrm>
-          <a:prstGeom prst="rect">
-            <a:avLst/>
-          </a:prstGeom>
-          <a:noFill/>
-        </p:spPr>
-        <p:txBody>
-          <a:bodyPr wrap="square" anchor="t" lIns="0" rIns="0" tIns="0" bIns="0">
-            <a:spAutoFit/>
-          </a:bodyPr>
-          <a:lstStyle/>
-          <a:p>
-            <a:pPr algn="l"/>
-            <a:r>
-              <a:rPr sz="1000" b="1" i="0">
-                <a:solidFill>
-                  <a:srgbClr val="8F989D"/>
-                </a:solidFill>
-                <a:latin typeface="Calibri"/>
-              </a:rPr>
-              <a:t>Inicio 5:10 pm</a:t>
-            </a:r>
-          </a:p>
-        </p:txBody>
-      </p:sp>
-      <p:sp>
-        <p:nvSpPr>
-          <p:cNvPr id="6" name="TextBox 5"/>
-          <p:cNvSpPr txBox="1"/>
-          <p:nvPr/>
-        </p:nvSpPr>
-        <p:spPr>
-          <a:xfrm>
             <a:off x="11094415" y="6446520"/>
             <a:ext cx="548640" cy="274320"/>
           </a:xfrm>
@@ -10367,41 +9877,6 @@
           </a:p>
         </p:txBody>
       </p:sp>
-      <p:sp>
-        <p:nvSpPr>
-          <p:cNvPr id="7" name="TextBox 6"/>
-          <p:cNvSpPr txBox="1"/>
-          <p:nvPr/>
-        </p:nvSpPr>
-        <p:spPr>
-          <a:xfrm>
-            <a:off x="2194560" y="6446520"/>
-            <a:ext cx="5943600" cy="274320"/>
-          </a:xfrm>
-          <a:prstGeom prst="rect">
-            <a:avLst/>
-          </a:prstGeom>
-          <a:noFill/>
-        </p:spPr>
-        <p:txBody>
-          <a:bodyPr wrap="square" anchor="t" lIns="0" rIns="0" tIns="0" bIns="0">
-            <a:spAutoFit/>
-          </a:bodyPr>
-          <a:lstStyle/>
-          <a:p>
-            <a:pPr algn="l"/>
-            <a:r>
-              <a:rPr sz="1000" b="1" i="0">
-                <a:solidFill>
-                  <a:srgbClr val="8F989D"/>
-                </a:solidFill>
-                <a:latin typeface="Calibri"/>
-              </a:rPr>
-              <a:t>Inicio 5:10 pm</a:t>
-            </a:r>
-          </a:p>
-        </p:txBody>
-      </p:sp>
     </p:spTree>
   </p:cSld>
   <p:clrMapOvr>
@@ -10929,41 +10404,6 @@
       <p:sp>
         <p:nvSpPr>
           <p:cNvPr id="5" name="TextBox 4"/>
-          <p:cNvSpPr txBox="1"/>
-          <p:nvPr/>
-        </p:nvSpPr>
-        <p:spPr>
-          <a:xfrm>
-            <a:off x="2194560" y="6446520"/>
-            <a:ext cx="5943600" cy="274320"/>
-          </a:xfrm>
-          <a:prstGeom prst="rect">
-            <a:avLst/>
-          </a:prstGeom>
-          <a:noFill/>
-        </p:spPr>
-        <p:txBody>
-          <a:bodyPr wrap="square" anchor="t" lIns="0" rIns="0" tIns="0" bIns="0">
-            <a:spAutoFit/>
-          </a:bodyPr>
-          <a:lstStyle/>
-          <a:p>
-            <a:pPr algn="l"/>
-            <a:r>
-              <a:rPr sz="1000" b="1" i="0">
-                <a:solidFill>
-                  <a:srgbClr val="8F989D"/>
-                </a:solidFill>
-                <a:latin typeface="Calibri"/>
-              </a:rPr>
-              <a:t>Inicio 5:10 pm</a:t>
-            </a:r>
-          </a:p>
-        </p:txBody>
-      </p:sp>
-      <p:sp>
-        <p:nvSpPr>
-          <p:cNvPr id="6" name="TextBox 5"/>
           <p:cNvSpPr txBox="1"/>
           <p:nvPr/>
         </p:nvSpPr>
@@ -11762,41 +11202,6 @@
         </p:nvSpPr>
         <p:spPr>
           <a:xfrm>
-            <a:off x="2194560" y="6446520"/>
-            <a:ext cx="5943600" cy="274320"/>
-          </a:xfrm>
-          <a:prstGeom prst="rect">
-            <a:avLst/>
-          </a:prstGeom>
-          <a:noFill/>
-        </p:spPr>
-        <p:txBody>
-          <a:bodyPr wrap="square" anchor="t" lIns="0" rIns="0" tIns="0" bIns="0">
-            <a:spAutoFit/>
-          </a:bodyPr>
-          <a:lstStyle/>
-          <a:p>
-            <a:pPr algn="l"/>
-            <a:r>
-              <a:rPr sz="1000" b="1" i="0">
-                <a:solidFill>
-                  <a:srgbClr val="8F989D"/>
-                </a:solidFill>
-                <a:latin typeface="Calibri"/>
-              </a:rPr>
-              <a:t>Inicio 5:10 pm</a:t>
-            </a:r>
-          </a:p>
-        </p:txBody>
-      </p:sp>
-      <p:sp>
-        <p:nvSpPr>
-          <p:cNvPr id="7" name="TextBox 6"/>
-          <p:cNvSpPr txBox="1"/>
-          <p:nvPr/>
-        </p:nvSpPr>
-        <p:spPr>
-          <a:xfrm>
             <a:off x="11094415" y="6446520"/>
             <a:ext cx="548640" cy="274320"/>
           </a:xfrm>
@@ -12245,41 +11650,6 @@
       <p:sp>
         <p:nvSpPr>
           <p:cNvPr id="5" name="TextBox 4"/>
-          <p:cNvSpPr txBox="1"/>
-          <p:nvPr/>
-        </p:nvSpPr>
-        <p:spPr>
-          <a:xfrm>
-            <a:off x="2194560" y="6446520"/>
-            <a:ext cx="5943600" cy="274320"/>
-          </a:xfrm>
-          <a:prstGeom prst="rect">
-            <a:avLst/>
-          </a:prstGeom>
-          <a:noFill/>
-        </p:spPr>
-        <p:txBody>
-          <a:bodyPr wrap="square" anchor="t" lIns="0" rIns="0" tIns="0" bIns="0">
-            <a:spAutoFit/>
-          </a:bodyPr>
-          <a:lstStyle/>
-          <a:p>
-            <a:pPr algn="l"/>
-            <a:r>
-              <a:rPr sz="1000" b="1" i="0">
-                <a:solidFill>
-                  <a:srgbClr val="8F989D"/>
-                </a:solidFill>
-                <a:latin typeface="Calibri"/>
-              </a:rPr>
-              <a:t>Inicio 5:10 pm</a:t>
-            </a:r>
-          </a:p>
-        </p:txBody>
-      </p:sp>
-      <p:sp>
-        <p:nvSpPr>
-          <p:cNvPr id="6" name="TextBox 5"/>
           <p:cNvSpPr txBox="1"/>
           <p:nvPr/>
         </p:nvSpPr>
@@ -13091,41 +12461,6 @@
         </p:nvSpPr>
         <p:spPr>
           <a:xfrm>
-            <a:off x="2194560" y="6446520"/>
-            <a:ext cx="5943600" cy="274320"/>
-          </a:xfrm>
-          <a:prstGeom prst="rect">
-            <a:avLst/>
-          </a:prstGeom>
-          <a:noFill/>
-        </p:spPr>
-        <p:txBody>
-          <a:bodyPr wrap="square" anchor="t" lIns="0" rIns="0" tIns="0" bIns="0">
-            <a:spAutoFit/>
-          </a:bodyPr>
-          <a:lstStyle/>
-          <a:p>
-            <a:pPr algn="l"/>
-            <a:r>
-              <a:rPr sz="1000" b="1" i="0">
-                <a:solidFill>
-                  <a:srgbClr val="8F989D"/>
-                </a:solidFill>
-                <a:latin typeface="Calibri"/>
-              </a:rPr>
-              <a:t>Inicio 5:10 pm</a:t>
-            </a:r>
-          </a:p>
-        </p:txBody>
-      </p:sp>
-      <p:sp>
-        <p:nvSpPr>
-          <p:cNvPr id="7" name="TextBox 6"/>
-          <p:cNvSpPr txBox="1"/>
-          <p:nvPr/>
-        </p:nvSpPr>
-        <p:spPr>
-          <a:xfrm>
             <a:off x="11094415" y="6446520"/>
             <a:ext cx="548640" cy="274320"/>
           </a:xfrm>
@@ -13550,41 +12885,6 @@
         </p:nvSpPr>
         <p:spPr>
           <a:xfrm>
-            <a:off x="2194560" y="6446520"/>
-            <a:ext cx="5943600" cy="274320"/>
-          </a:xfrm>
-          <a:prstGeom prst="rect">
-            <a:avLst/>
-          </a:prstGeom>
-          <a:noFill/>
-        </p:spPr>
-        <p:txBody>
-          <a:bodyPr wrap="square" anchor="t" lIns="0" rIns="0" tIns="0" bIns="0">
-            <a:spAutoFit/>
-          </a:bodyPr>
-          <a:lstStyle/>
-          <a:p>
-            <a:pPr algn="l"/>
-            <a:r>
-              <a:rPr sz="1000" b="1" i="0">
-                <a:solidFill>
-                  <a:srgbClr val="8F989D"/>
-                </a:solidFill>
-                <a:latin typeface="Calibri"/>
-              </a:rPr>
-              <a:t>Inicio 5:10 pm</a:t>
-            </a:r>
-          </a:p>
-        </p:txBody>
-      </p:sp>
-      <p:sp>
-        <p:nvSpPr>
-          <p:cNvPr id="6" name="TextBox 5"/>
-          <p:cNvSpPr txBox="1"/>
-          <p:nvPr/>
-        </p:nvSpPr>
-        <p:spPr>
-          <a:xfrm>
             <a:off x="11094415" y="6446520"/>
             <a:ext cx="548640" cy="274320"/>
           </a:xfrm>
@@ -13777,41 +13077,6 @@
       <p:sp>
         <p:nvSpPr>
           <p:cNvPr id="5" name="TextBox 4"/>
-          <p:cNvSpPr txBox="1"/>
-          <p:nvPr/>
-        </p:nvSpPr>
-        <p:spPr>
-          <a:xfrm>
-            <a:off x="2194560" y="6446520"/>
-            <a:ext cx="5943600" cy="274320"/>
-          </a:xfrm>
-          <a:prstGeom prst="rect">
-            <a:avLst/>
-          </a:prstGeom>
-          <a:noFill/>
-        </p:spPr>
-        <p:txBody>
-          <a:bodyPr wrap="square" anchor="t" lIns="0" rIns="0" tIns="0" bIns="0">
-            <a:spAutoFit/>
-          </a:bodyPr>
-          <a:lstStyle/>
-          <a:p>
-            <a:pPr algn="l"/>
-            <a:r>
-              <a:rPr sz="1000" b="1" i="0">
-                <a:solidFill>
-                  <a:srgbClr val="8F989D"/>
-                </a:solidFill>
-                <a:latin typeface="Calibri"/>
-              </a:rPr>
-              <a:t>Inicio 5:10 pm</a:t>
-            </a:r>
-          </a:p>
-        </p:txBody>
-      </p:sp>
-      <p:sp>
-        <p:nvSpPr>
-          <p:cNvPr id="6" name="TextBox 5"/>
           <p:cNvSpPr txBox="1"/>
           <p:nvPr/>
         </p:nvSpPr>
@@ -14652,41 +13917,6 @@
         </p:nvSpPr>
         <p:spPr>
           <a:xfrm>
-            <a:off x="2194560" y="6446520"/>
-            <a:ext cx="5943600" cy="274320"/>
-          </a:xfrm>
-          <a:prstGeom prst="rect">
-            <a:avLst/>
-          </a:prstGeom>
-          <a:noFill/>
-        </p:spPr>
-        <p:txBody>
-          <a:bodyPr wrap="square" anchor="t" lIns="0" rIns="0" tIns="0" bIns="0">
-            <a:spAutoFit/>
-          </a:bodyPr>
-          <a:lstStyle/>
-          <a:p>
-            <a:pPr algn="l"/>
-            <a:r>
-              <a:rPr sz="1000" b="1" i="0">
-                <a:solidFill>
-                  <a:srgbClr val="8F989D"/>
-                </a:solidFill>
-                <a:latin typeface="Calibri"/>
-              </a:rPr>
-              <a:t>Inicio 5:10 pm</a:t>
-            </a:r>
-          </a:p>
-        </p:txBody>
-      </p:sp>
-      <p:sp>
-        <p:nvSpPr>
-          <p:cNvPr id="7" name="TextBox 6"/>
-          <p:cNvSpPr txBox="1"/>
-          <p:nvPr/>
-        </p:nvSpPr>
-        <p:spPr>
-          <a:xfrm>
             <a:off x="11094415" y="6446520"/>
             <a:ext cx="548640" cy="274320"/>
           </a:xfrm>

--- a/Pregrado/Creatividad y pensamiento innovador/Clases/Sesion 02 - Creatividadinnovación en I+D · Design Thinking y técnicas/Presentacion.pptx
+++ b/Pregrado/Creatividad y pensamiento innovador/Clases/Sesion 02 - Creatividadinnovación en I+D · Design Thinking y técnicas/Presentacion.pptx
@@ -8440,7 +8440,7 @@
                 </a:solidFill>
                 <a:latin typeface="Calibri"/>
               </a:rPr>
-              <a:t>`S03_Ideacion_Apellido`</a:t>
+              <a:t>`S02_Ideacion_Apellido`</a:t>
             </a:r>
             <a:r>
               <a:rPr sz="1600" b="0" i="0">
@@ -9258,7 +9258,7 @@
                 </a:solidFill>
                 <a:latin typeface="Calibri"/>
               </a:rPr>
-              <a:t>`S03_Ideacion_Apellido`</a:t>
+              <a:t>`S02_Ideacion_Apellido`</a:t>
             </a:r>
             <a:r>
               <a:rPr sz="1600" b="0" i="0">

--- a/Pregrado/Creatividad y pensamiento innovador/Clases/Sesion 02 - Creatividadinnovación en I+D · Design Thinking y técnicas/Presentacion.pptx
+++ b/Pregrado/Creatividad y pensamiento innovador/Clases/Sesion 02 - Creatividadinnovación en I+D · Design Thinking y técnicas/Presentacion.pptx
@@ -27,6 +27,8 @@
     <p:sldId id="275" r:id="rId26"/>
     <p:sldId id="276" r:id="rId27"/>
     <p:sldId id="277" r:id="rId28"/>
+    <p:sldId id="278" r:id="rId29"/>
+    <p:sldId id="279" r:id="rId30"/>
   </p:sldIdLst>
   <p:sldSz cx="12191695" cy="6858000" type="screen4x3"/>
   <p:notesSz cx="6858000" cy="9144000"/>
@@ -7505,7 +7507,7 @@
                 </a:solidFill>
                 <a:latin typeface="Calibri"/>
               </a:rPr>
-              <a:t>TALLER — Ideación sobre su propio problema (22 minutos)</a:t>
+              <a:t>TALLER · Ideación sobre su propio problema</a:t>
             </a:r>
           </a:p>
         </p:txBody>
@@ -7518,8 +7520,8 @@
         </p:nvSpPr>
         <p:spPr>
           <a:xfrm>
-            <a:off x="640080" y="1691639"/>
-            <a:ext cx="10911535" cy="4617720"/>
+            <a:off x="640080" y="1280160"/>
+            <a:ext cx="10911535" cy="411480"/>
           </a:xfrm>
           <a:prstGeom prst="rect">
             <a:avLst/>
@@ -7532,6 +7534,59 @@
           </a:bodyPr>
           <a:lstStyle/>
           <a:p>
+            <a:pPr algn="ctr"/>
+            <a:r>
+              <a:rPr sz="1500" b="0" i="0">
+                <a:solidFill>
+                  <a:srgbClr val="2B2B2B"/>
+                </a:solidFill>
+                <a:latin typeface="Calibri"/>
+              </a:rPr>
+              <a:t>Individual o en dúo, sobre </a:t>
+            </a:r>
+            <a:r>
+              <a:rPr sz="1500" b="1" i="0">
+                <a:solidFill>
+                  <a:srgbClr val="2B2B2B"/>
+                </a:solidFill>
+                <a:latin typeface="Calibri"/>
+              </a:rPr>
+              <a:t>su</a:t>
+            </a:r>
+            <a:r>
+              <a:rPr sz="1500" b="0" i="0">
+                <a:solidFill>
+                  <a:srgbClr val="2B2B2B"/>
+                </a:solidFill>
+                <a:latin typeface="Calibri"/>
+              </a:rPr>
+              <a:t> problema · el Docente pasa acompañando</a:t>
+            </a:r>
+          </a:p>
+        </p:txBody>
+      </p:sp>
+      <p:sp>
+        <p:nvSpPr>
+          <p:cNvPr id="5" name="TextBox 4"/>
+          <p:cNvSpPr txBox="1"/>
+          <p:nvPr/>
+        </p:nvSpPr>
+        <p:spPr>
+          <a:xfrm>
+            <a:off x="640080" y="2011679"/>
+            <a:ext cx="10911535" cy="4297680"/>
+          </a:xfrm>
+          <a:prstGeom prst="rect">
+            <a:avLst/>
+          </a:prstGeom>
+          <a:noFill/>
+        </p:spPr>
+        <p:txBody>
+          <a:bodyPr wrap="square" anchor="t" lIns="0" rIns="0" tIns="0" bIns="0">
+            <a:spAutoFit/>
+          </a:bodyPr>
+          <a:lstStyle/>
+          <a:p>
             <a:pPr>
               <a:spcAft>
                 <a:spcPts val="1000"/>
@@ -7544,7 +7599,7 @@
                 </a:solidFill>
                 <a:latin typeface="Calibri"/>
               </a:rPr>
-              <a:t>–   Trabajan sobre </a:t>
+              <a:t>–   </a:t>
             </a:r>
             <a:r>
               <a:rPr sz="1600" b="1" i="0">
@@ -7553,7 +7608,7 @@
                 </a:solidFill>
                 <a:latin typeface="Calibri"/>
               </a:rPr>
-              <a:t>SU</a:t>
+              <a:t>Al final tiene:</a:t>
             </a:r>
             <a:r>
               <a:rPr sz="1600" b="0" i="0">
@@ -7562,7 +7617,7 @@
                 </a:solidFill>
                 <a:latin typeface="Calibri"/>
               </a:rPr>
-              <a:t> problema, solos o en dúo. Cuatro pasos, en este orden:</a:t>
+              <a:t> su HMW, el banco de ideas y la captura del boceto, en un solo archivo.</a:t>
             </a:r>
           </a:p>
           <a:p>
@@ -7587,7 +7642,7 @@
                 </a:solidFill>
                 <a:latin typeface="Calibri"/>
               </a:rPr>
-              <a:t>Paso 1 (4 min)</a:t>
+              <a:t>Paso 1</a:t>
             </a:r>
             <a:r>
               <a:rPr sz="1600" b="0" i="0">
@@ -7596,7 +7651,7 @@
                 </a:solidFill>
                 <a:latin typeface="Calibri"/>
               </a:rPr>
-              <a:t> · Redacten </a:t>
+              <a:t> · Redacte </a:t>
             </a:r>
             <a:r>
               <a:rPr sz="1600" b="1" i="0">
@@ -7639,7 +7694,7 @@
                 </a:solidFill>
                 <a:latin typeface="Calibri"/>
               </a:rPr>
-              <a:t>Paso 2 (8 min)</a:t>
+              <a:t>Paso 2</a:t>
             </a:r>
             <a:r>
               <a:rPr sz="1600" b="0" i="0">
@@ -7648,7 +7703,7 @@
                 </a:solidFill>
                 <a:latin typeface="Calibri"/>
               </a:rPr>
-              <a:t> · Generen </a:t>
+              <a:t> · Genere </a:t>
             </a:r>
             <a:r>
               <a:rPr sz="1600" b="1" i="0">
@@ -7666,7 +7721,7 @@
                 </a:solidFill>
                 <a:latin typeface="Calibri"/>
               </a:rPr>
-              <a:t> sin juzgar ninguna. Si se secan antes de 8, apliquen </a:t>
+              <a:t> sin juzgar ninguna. Si se seca antes de 8, aplique </a:t>
             </a:r>
             <a:r>
               <a:rPr sz="1600" b="1" i="0">
@@ -7709,7 +7764,7 @@
                 </a:solidFill>
                 <a:latin typeface="Calibri"/>
               </a:rPr>
-              <a:t>Paso 3 (5 min)</a:t>
+              <a:t>Paso 3</a:t>
             </a:r>
             <a:r>
               <a:rPr sz="1600" b="0" i="0">
@@ -7727,7 +7782,7 @@
                 </a:solidFill>
                 <a:latin typeface="Calibri"/>
               </a:rPr>
-              <a:t>Elijan 1 o 2</a:t>
+              <a:t>Elija 1 o 2</a:t>
             </a:r>
             <a:r>
               <a:rPr sz="1600" b="0" i="0">
@@ -7736,7 +7791,7 @@
                 </a:solidFill>
                 <a:latin typeface="Calibri"/>
               </a:rPr>
-              <a:t> y justifíquenlas con los tres criterios: alivia el dolor · factible este semestre · aprendo rápido.</a:t>
+              <a:t> y justifíquelas con los tres criterios: alivia el dolor · factible este semestre · aprendo rápido.</a:t>
             </a:r>
           </a:p>
           <a:p>
@@ -7761,7 +7816,7 @@
                 </a:solidFill>
                 <a:latin typeface="Calibri"/>
               </a:rPr>
-              <a:t>Paso 4 (5 min)</a:t>
+              <a:t>Paso 4</a:t>
             </a:r>
             <a:r>
               <a:rPr sz="1600" b="0" i="0">
@@ -7770,7 +7825,7 @@
                 </a:solidFill>
                 <a:latin typeface="Calibri"/>
               </a:rPr>
-              <a:t> · </a:t>
+              <a:t> · Haga el </a:t>
             </a:r>
             <a:r>
               <a:rPr sz="1600" b="1" i="0">
@@ -7779,7 +7834,7 @@
                 </a:solidFill>
                 <a:latin typeface="Calibri"/>
               </a:rPr>
-              <a:t>Boceto de 1 minuto</a:t>
+              <a:t>boceto de 1 minuto</a:t>
             </a:r>
             <a:r>
               <a:rPr sz="1600" b="0" i="0">
@@ -7804,7 +7859,7 @@
                 </a:solidFill>
                 <a:latin typeface="Calibri"/>
               </a:rPr>
-              <a:t>–   Al final le pido a </a:t>
+              <a:t>–   </a:t>
             </a:r>
             <a:r>
               <a:rPr sz="1600" b="1" i="0">
@@ -7813,7 +7868,7 @@
                 </a:solidFill>
                 <a:latin typeface="Calibri"/>
               </a:rPr>
-              <a:t>tres personas</a:t>
+              <a:t>Paso 5</a:t>
             </a:r>
             <a:r>
               <a:rPr sz="1600" b="0" i="0">
@@ -7822,7 +7877,7 @@
                 </a:solidFill>
                 <a:latin typeface="Calibri"/>
               </a:rPr>
-              <a:t> que lean </a:t>
+              <a:t> · Lea </a:t>
             </a:r>
             <a:r>
               <a:rPr sz="1600" b="1" i="0">
@@ -7840,7 +7895,7 @@
                 </a:solidFill>
                 <a:latin typeface="Calibri"/>
               </a:rPr>
-              <a:t>, en 20 segundos cada una.</a:t>
+              <a:t> en voz alta a tres compañeros, una frase cada uno.</a:t>
             </a:r>
           </a:p>
           <a:p>
@@ -7865,7 +7920,7 @@
                 </a:solidFill>
                 <a:latin typeface="Calibri"/>
               </a:rPr>
-              <a:t>Criterio de éxito verificable:</a:t>
+              <a:t>En clase, sin falta:</a:t>
             </a:r>
             <a:r>
               <a:rPr sz="1600" b="0" i="0">
@@ -7874,7 +7929,7 @@
                 </a:solidFill>
                 <a:latin typeface="Calibri"/>
               </a:rPr>
-              <a:t> su HMW menciona </a:t>
+              <a:t> los </a:t>
             </a:r>
             <a:r>
               <a:rPr sz="1600" b="1" i="0">
@@ -7883,7 +7938,7 @@
                 </a:solidFill>
                 <a:latin typeface="Calibri"/>
               </a:rPr>
-              <a:t>al usuario</a:t>
+              <a:t>pasos 1 a 2</a:t>
             </a:r>
             <a:r>
               <a:rPr sz="1600" b="0" i="0">
@@ -7892,66 +7947,14 @@
                 </a:solidFill>
                 <a:latin typeface="Calibri"/>
               </a:rPr>
-              <a:t> y </a:t>
-            </a:r>
-            <a:r>
-              <a:rPr sz="1600" b="1" i="0">
-                <a:solidFill>
-                  <a:srgbClr val="2B2B2B"/>
-                </a:solidFill>
-                <a:latin typeface="Calibri"/>
-              </a:rPr>
-              <a:t>el dolor</a:t>
-            </a:r>
-            <a:r>
-              <a:rPr sz="1600" b="0" i="0">
-                <a:solidFill>
-                  <a:srgbClr val="2B2B2B"/>
-                </a:solidFill>
-                <a:latin typeface="Calibri"/>
-              </a:rPr>
-              <a:t>, y </a:t>
-            </a:r>
-            <a:r>
-              <a:rPr sz="1600" b="1" i="0">
-                <a:solidFill>
-                  <a:srgbClr val="2B2B2B"/>
-                </a:solidFill>
-                <a:latin typeface="Calibri"/>
-              </a:rPr>
-              <a:t>no</a:t>
-            </a:r>
-            <a:r>
-              <a:rPr sz="1600" b="0" i="0">
-                <a:solidFill>
-                  <a:srgbClr val="2B2B2B"/>
-                </a:solidFill>
-                <a:latin typeface="Calibri"/>
-              </a:rPr>
-              <a:t> menciona ninguna tecnología.</a:t>
-            </a:r>
-          </a:p>
-          <a:p>
-            <a:pPr lvl="1">
-              <a:spcAft>
-                <a:spcPts val="600"/>
-              </a:spcAft>
-            </a:pPr>
-            <a:r>
-              <a:rPr sz="1500" b="0" i="0">
-                <a:solidFill>
-                  <a:srgbClr val="2B2B2B"/>
-                </a:solidFill>
-                <a:latin typeface="Calibri"/>
-              </a:rPr>
-              <a:t>●   Si en su HMW aparece la palabra app, plataforma, IA o sistema, todavía no está listo: reescríbalo.</a:t>
-            </a:r>
-          </a:p>
-        </p:txBody>
-      </p:sp>
-      <p:sp>
-        <p:nvSpPr>
-          <p:cNvPr id="5" name="TextBox 4"/>
+              <a:t>. Del 3 en adelante puede quedar en trabajo autónomo, pero antes de la próxima sesión.</a:t>
+            </a:r>
+          </a:p>
+        </p:txBody>
+      </p:sp>
+      <p:sp>
+        <p:nvSpPr>
+          <p:cNvPr id="6" name="TextBox 5"/>
           <p:cNvSpPr txBox="1"/>
           <p:nvPr/>
         </p:nvSpPr>
@@ -7980,58 +7983,6 @@
                 <a:latin typeface="Calibri"/>
               </a:rPr>
               <a:t>18</a:t>
-            </a:r>
-          </a:p>
-        </p:txBody>
-      </p:sp>
-      <p:sp>
-        <p:nvSpPr>
-          <p:cNvPr id="6" name="TextBox 5"/>
-          <p:cNvSpPr txBox="1"/>
-          <p:nvPr/>
-        </p:nvSpPr>
-        <p:spPr>
-          <a:xfrm>
-            <a:off x="640080" y="5943600"/>
-            <a:ext cx="9997135" cy="457200"/>
-          </a:xfrm>
-          <a:prstGeom prst="rect">
-            <a:avLst/>
-          </a:prstGeom>
-          <a:noFill/>
-        </p:spPr>
-        <p:txBody>
-          <a:bodyPr wrap="square" anchor="t" lIns="0" rIns="0" tIns="0" bIns="0">
-            <a:spAutoFit/>
-          </a:bodyPr>
-          <a:lstStyle/>
-          <a:p>
-            <a:r>
-              <a:rPr sz="1200" b="0" i="1">
-                <a:solidFill>
-                  <a:srgbClr val="2B2B2B"/>
-                </a:solidFill>
-                <a:latin typeface="Calibri"/>
-              </a:rPr>
-              <a:t>Entregable de hoy: </a:t>
-            </a:r>
-            <a:r>
-              <a:rPr sz="1200" b="1" i="1">
-                <a:solidFill>
-                  <a:srgbClr val="2B2B2B"/>
-                </a:solidFill>
-                <a:latin typeface="Calibri"/>
-              </a:rPr>
-              <a:t>HMW + banco de ideas + captura del boceto</a:t>
-            </a:r>
-            <a:r>
-              <a:rPr sz="1200" b="0" i="1">
-                <a:solidFill>
-                  <a:srgbClr val="2B2B2B"/>
-                </a:solidFill>
-                <a:latin typeface="Calibri"/>
-              </a:rPr>
-              <a:t>, en un solo archivo.</a:t>
             </a:r>
           </a:p>
         </p:txBody>
@@ -8136,7 +8087,7 @@
                 </a:solidFill>
                 <a:latin typeface="Calibri"/>
               </a:rPr>
-              <a:t>Antes de entregar: revise usted mismo</a:t>
+              <a:t>TALLER · cómo se revisa y dónde se entrega</a:t>
             </a:r>
           </a:p>
         </p:txBody>
@@ -8149,8 +8100,8 @@
         </p:nvSpPr>
         <p:spPr>
           <a:xfrm>
-            <a:off x="640080" y="1691639"/>
-            <a:ext cx="10911535" cy="4617720"/>
+            <a:off x="640080" y="1280160"/>
+            <a:ext cx="10911535" cy="411480"/>
           </a:xfrm>
           <a:prstGeom prst="rect">
             <a:avLst/>
@@ -8163,6 +8114,41 @@
           </a:bodyPr>
           <a:lstStyle/>
           <a:p>
+            <a:pPr algn="ctr"/>
+            <a:r>
+              <a:rPr sz="1500" b="0" i="0">
+                <a:solidFill>
+                  <a:srgbClr val="2B2B2B"/>
+                </a:solidFill>
+                <a:latin typeface="Calibri"/>
+              </a:rPr>
+              <a:t>Ideación sobre su propio problema</a:t>
+            </a:r>
+          </a:p>
+        </p:txBody>
+      </p:sp>
+      <p:sp>
+        <p:nvSpPr>
+          <p:cNvPr id="5" name="TextBox 4"/>
+          <p:cNvSpPr txBox="1"/>
+          <p:nvPr/>
+        </p:nvSpPr>
+        <p:spPr>
+          <a:xfrm>
+            <a:off x="640080" y="2011679"/>
+            <a:ext cx="10911535" cy="4297680"/>
+          </a:xfrm>
+          <a:prstGeom prst="rect">
+            <a:avLst/>
+          </a:prstGeom>
+          <a:noFill/>
+        </p:spPr>
+        <p:txBody>
+          <a:bodyPr wrap="square" anchor="t" lIns="0" rIns="0" tIns="0" bIns="0">
+            <a:spAutoFit/>
+          </a:bodyPr>
+          <a:lstStyle/>
+          <a:p>
             <a:pPr>
               <a:spcAft>
                 <a:spcPts val="1000"/>
@@ -8175,7 +8161,7 @@
                 </a:solidFill>
                 <a:latin typeface="Calibri"/>
               </a:rPr>
-              <a:t>–   ☐ Mi HMW nombra </a:t>
+              <a:t>–   </a:t>
             </a:r>
             <a:r>
               <a:rPr sz="1600" b="1" i="0">
@@ -8184,7 +8170,7 @@
                 </a:solidFill>
                 <a:latin typeface="Calibri"/>
               </a:rPr>
-              <a:t>una persona concreta</a:t>
+              <a:t>Quedó bien si</a:t>
             </a:r>
             <a:r>
               <a:rPr sz="1600" b="0" i="0">
@@ -8193,7 +8179,127 @@
                 </a:solidFill>
                 <a:latin typeface="Calibri"/>
               </a:rPr>
-              <a:t>, no "los usuarios" ni "la comunidad".</a:t>
+              <a:t> —compruébelo usted antes de cerrar el documento—:</a:t>
+            </a:r>
+          </a:p>
+          <a:p>
+            <a:pPr lvl="1">
+              <a:spcAft>
+                <a:spcPts val="600"/>
+              </a:spcAft>
+            </a:pPr>
+            <a:r>
+              <a:rPr sz="1500" b="0" i="0">
+                <a:solidFill>
+                  <a:srgbClr val="2B2B2B"/>
+                </a:solidFill>
+                <a:latin typeface="Calibri"/>
+              </a:rPr>
+              <a:t>●   Su HMW nombra </a:t>
+            </a:r>
+            <a:r>
+              <a:rPr sz="1500" b="1" i="0">
+                <a:solidFill>
+                  <a:srgbClr val="2B2B2B"/>
+                </a:solidFill>
+                <a:latin typeface="Calibri"/>
+              </a:rPr>
+              <a:t>al usuario</a:t>
+            </a:r>
+            <a:r>
+              <a:rPr sz="1500" b="0" i="0">
+                <a:solidFill>
+                  <a:srgbClr val="2B2B2B"/>
+                </a:solidFill>
+                <a:latin typeface="Calibri"/>
+              </a:rPr>
+              <a:t> y </a:t>
+            </a:r>
+            <a:r>
+              <a:rPr sz="1500" b="1" i="0">
+                <a:solidFill>
+                  <a:srgbClr val="2B2B2B"/>
+                </a:solidFill>
+                <a:latin typeface="Calibri"/>
+              </a:rPr>
+              <a:t>el dolor</a:t>
+            </a:r>
+            <a:r>
+              <a:rPr sz="1500" b="0" i="0">
+                <a:solidFill>
+                  <a:srgbClr val="2B2B2B"/>
+                </a:solidFill>
+                <a:latin typeface="Calibri"/>
+              </a:rPr>
+              <a:t>.</a:t>
+            </a:r>
+          </a:p>
+          <a:p>
+            <a:pPr lvl="1">
+              <a:spcAft>
+                <a:spcPts val="600"/>
+              </a:spcAft>
+            </a:pPr>
+            <a:r>
+              <a:rPr sz="1500" b="0" i="0">
+                <a:solidFill>
+                  <a:srgbClr val="2B2B2B"/>
+                </a:solidFill>
+                <a:latin typeface="Calibri"/>
+              </a:rPr>
+              <a:t>●   Su HMW </a:t>
+            </a:r>
+            <a:r>
+              <a:rPr sz="1500" b="1" i="0">
+                <a:solidFill>
+                  <a:srgbClr val="2B2B2B"/>
+                </a:solidFill>
+                <a:latin typeface="Calibri"/>
+              </a:rPr>
+              <a:t>no</a:t>
+            </a:r>
+            <a:r>
+              <a:rPr sz="1500" b="0" i="0">
+                <a:solidFill>
+                  <a:srgbClr val="2B2B2B"/>
+                </a:solidFill>
+                <a:latin typeface="Calibri"/>
+              </a:rPr>
+              <a:t> nombra ninguna tecnología: si aparece app, plataforma, IA o sistema, todavía no está listo y hay que reescribirlo.</a:t>
+            </a:r>
+          </a:p>
+          <a:p>
+            <a:pPr lvl="1">
+              <a:spcAft>
+                <a:spcPts val="600"/>
+              </a:spcAft>
+            </a:pPr>
+            <a:r>
+              <a:rPr sz="1500" b="0" i="0">
+                <a:solidFill>
+                  <a:srgbClr val="2B2B2B"/>
+                </a:solidFill>
+                <a:latin typeface="Calibri"/>
+              </a:rPr>
+              <a:t>●   Hay </a:t>
+            </a:r>
+            <a:r>
+              <a:rPr sz="1500" b="1" i="0">
+                <a:solidFill>
+                  <a:srgbClr val="2B2B2B"/>
+                </a:solidFill>
+                <a:latin typeface="Calibri"/>
+              </a:rPr>
+              <a:t>8 ideas o más</a:t>
+            </a:r>
+            <a:r>
+              <a:rPr sz="1500" b="0" i="0">
+                <a:solidFill>
+                  <a:srgbClr val="2B2B2B"/>
+                </a:solidFill>
+                <a:latin typeface="Calibri"/>
+              </a:rPr>
+              <a:t> y ninguna se borró mientras las escribía.</a:t>
             </a:r>
           </a:p>
           <a:p>
@@ -8209,7 +8315,7 @@
                 </a:solidFill>
                 <a:latin typeface="Calibri"/>
               </a:rPr>
-              <a:t>–   ☐ Mi HMW dice </a:t>
+              <a:t>–   </a:t>
             </a:r>
             <a:r>
               <a:rPr sz="1600" b="1" i="0">
@@ -8218,7 +8324,7 @@
                 </a:solidFill>
                 <a:latin typeface="Calibri"/>
               </a:rPr>
-              <a:t>qué gana</a:t>
+              <a:t>Plan B:</a:t>
             </a:r>
             <a:r>
               <a:rPr sz="1600" b="0" i="0">
@@ -8227,7 +8333,7 @@
                 </a:solidFill>
                 <a:latin typeface="Calibri"/>
               </a:rPr>
-              <a:t> esa persona (tiempo, tranquilidad, dinero, seguridad).</a:t>
+              <a:t> Si no llega a 8 ideas, deje de buscar ideas nuevas: aplique SCAMPER a la que ya tiene —sustituir, combinar, adaptar, invertir— y salen solas.</a:t>
             </a:r>
           </a:p>
           <a:p>
@@ -8243,7 +8349,7 @@
                 </a:solidFill>
                 <a:latin typeface="Calibri"/>
               </a:rPr>
-              <a:t>–   ☐ Mi HMW </a:t>
+              <a:t>–   </a:t>
             </a:r>
             <a:r>
               <a:rPr sz="1600" b="1" i="0">
@@ -8252,7 +8358,7 @@
                 </a:solidFill>
                 <a:latin typeface="Calibri"/>
               </a:rPr>
-              <a:t>no</a:t>
+              <a:t>Hoy no se sube nada al aula:</a:t>
             </a:r>
             <a:r>
               <a:rPr sz="1600" b="0" i="0">
@@ -8261,7 +8367,25 @@
                 </a:solidFill>
                 <a:latin typeface="Calibri"/>
               </a:rPr>
-              <a:t> contiene la palabra app, plataforma, sistema, IA ni sensor.</a:t>
+              <a:t> guarde `S02_Ideacion_Apellido` (Google Doc o PDF) en su Drive y tráigalo a la próxima sesión. Es un </a:t>
+            </a:r>
+            <a:r>
+              <a:rPr sz="1600" b="1" i="0">
+                <a:solidFill>
+                  <a:srgbClr val="2B2B2B"/>
+                </a:solidFill>
+                <a:latin typeface="Calibri"/>
+              </a:rPr>
+              <a:t>avance formativo</a:t>
+            </a:r>
+            <a:r>
+              <a:rPr sz="1600" b="0" i="0">
+                <a:solidFill>
+                  <a:srgbClr val="2B2B2B"/>
+                </a:solidFill>
+                <a:latin typeface="Calibri"/>
+              </a:rPr>
+              <a:t>, se revisa en clase.</a:t>
             </a:r>
           </a:p>
           <a:p>
@@ -8277,7 +8401,7 @@
                 </a:solidFill>
                 <a:latin typeface="Calibri"/>
               </a:rPr>
-              <a:t>–   ☐ Tengo </a:t>
+              <a:t>–   </a:t>
             </a:r>
             <a:r>
               <a:rPr sz="1600" b="1" i="0">
@@ -8286,7 +8410,7 @@
                 </a:solidFill>
                 <a:latin typeface="Calibri"/>
               </a:rPr>
-              <a:t>8 ideas o más</a:t>
+              <a:t>Esto alimenta:</a:t>
             </a:r>
             <a:r>
               <a:rPr sz="1600" b="0" i="0">
@@ -8295,7 +8419,7 @@
                 </a:solidFill>
                 <a:latin typeface="Calibri"/>
               </a:rPr>
-              <a:t> escritas, y </a:t>
+              <a:t> </a:t>
             </a:r>
             <a:r>
               <a:rPr sz="1600" b="1" i="0">
@@ -8304,7 +8428,7 @@
                 </a:solidFill>
                 <a:latin typeface="Calibri"/>
               </a:rPr>
-              <a:t>al menos una es claramente absurda</a:t>
+              <a:t>ACA Final</a:t>
             </a:r>
             <a:r>
               <a:rPr sz="1600" b="0" i="0">
@@ -8313,15 +8437,17 @@
                 </a:solidFill>
                 <a:latin typeface="Calibri"/>
               </a:rPr>
-              <a:t> (señal de que sí divergí).</a:t>
-            </a:r>
-          </a:p>
-          <a:p>
-            <a:pPr>
-              <a:spcAft>
-                <a:spcPts val="1000"/>
-              </a:spcAft>
-            </a:pPr>
+              <a:t> —tarea, 32,8%—, el documento que </a:t>
+            </a:r>
+            <a:r>
+              <a:rPr sz="1600" b="1" i="0">
+                <a:solidFill>
+                  <a:srgbClr val="2B2B2B"/>
+                </a:solidFill>
+                <a:latin typeface="Calibri"/>
+              </a:rPr>
+              <a:t>sí</a:t>
+            </a:r>
             <a:r>
               <a:rPr sz="1600" b="0" i="0">
                 <a:solidFill>
@@ -8329,15 +8455,17 @@
                 </a:solidFill>
                 <a:latin typeface="Calibri"/>
               </a:rPr>
-              <a:t>–   ☐ Ninguna idea fue borrada durante la fase de generación.</a:t>
-            </a:r>
-          </a:p>
-          <a:p>
-            <a:pPr>
-              <a:spcAft>
-                <a:spcPts val="1000"/>
-              </a:spcAft>
-            </a:pPr>
+              <a:t> recibe </a:t>
+            </a:r>
+            <a:r>
+              <a:rPr sz="1600" b="1" i="0">
+                <a:solidFill>
+                  <a:srgbClr val="2B2B2B"/>
+                </a:solidFill>
+                <a:latin typeface="Calibri"/>
+              </a:rPr>
+              <a:t>CDigital</a:t>
+            </a:r>
             <a:r>
               <a:rPr sz="1600" b="0" i="0">
                 <a:solidFill>
@@ -8345,7 +8473,7 @@
                 </a:solidFill>
                 <a:latin typeface="Calibri"/>
               </a:rPr>
-              <a:t>–   ☐ Elegí </a:t>
+              <a:t>; cierra en la semana de la </a:t>
             </a:r>
             <a:r>
               <a:rPr sz="1600" b="1" i="0">
@@ -8354,7 +8482,7 @@
                 </a:solidFill>
                 <a:latin typeface="Calibri"/>
               </a:rPr>
-              <a:t>1 o 2</a:t>
+              <a:t>Sesión 06</a:t>
             </a:r>
             <a:r>
               <a:rPr sz="1600" b="0" i="0">
@@ -8363,134 +8491,14 @@
                 </a:solidFill>
                 <a:latin typeface="Calibri"/>
               </a:rPr>
-              <a:t> ideas y escribí </a:t>
-            </a:r>
-            <a:r>
-              <a:rPr sz="1600" b="1" i="0">
-                <a:solidFill>
-                  <a:srgbClr val="2B2B2B"/>
-                </a:solidFill>
-                <a:latin typeface="Calibri"/>
-              </a:rPr>
-              <a:t>por qué</a:t>
-            </a:r>
-            <a:r>
-              <a:rPr sz="1600" b="0" i="0">
-                <a:solidFill>
-                  <a:srgbClr val="2B2B2B"/>
-                </a:solidFill>
-                <a:latin typeface="Calibri"/>
-              </a:rPr>
-              <a:t>, nombrando los tres criterios uno por uno.</a:t>
-            </a:r>
-          </a:p>
-          <a:p>
-            <a:pPr>
-              <a:spcAft>
-                <a:spcPts val="1000"/>
-              </a:spcAft>
-            </a:pPr>
-            <a:r>
-              <a:rPr sz="1600" b="0" i="0">
-                <a:solidFill>
-                  <a:srgbClr val="2B2B2B"/>
-                </a:solidFill>
-                <a:latin typeface="Calibri"/>
-              </a:rPr>
-              <a:t>–   ☐ Mi boceto tiene </a:t>
-            </a:r>
-            <a:r>
-              <a:rPr sz="1600" b="1" i="0">
-                <a:solidFill>
-                  <a:srgbClr val="2B2B2B"/>
-                </a:solidFill>
-                <a:latin typeface="Calibri"/>
-              </a:rPr>
-              <a:t>cajas y flechas</a:t>
-            </a:r>
-            <a:r>
-              <a:rPr sz="1600" b="0" i="0">
-                <a:solidFill>
-                  <a:srgbClr val="2B2B2B"/>
-                </a:solidFill>
-                <a:latin typeface="Calibri"/>
-              </a:rPr>
-              <a:t> y se entiende sin que yo lo explique.</a:t>
-            </a:r>
-          </a:p>
-          <a:p>
-            <a:pPr>
-              <a:spcAft>
-                <a:spcPts val="1000"/>
-              </a:spcAft>
-            </a:pPr>
-            <a:r>
-              <a:rPr sz="1600" b="0" i="0">
-                <a:solidFill>
-                  <a:srgbClr val="2B2B2B"/>
-                </a:solidFill>
-                <a:latin typeface="Calibri"/>
-              </a:rPr>
-              <a:t>–   ☐ El archivo está nombrado </a:t>
-            </a:r>
-            <a:r>
-              <a:rPr sz="1600" b="1" i="0">
-                <a:solidFill>
-                  <a:srgbClr val="2B2B2B"/>
-                </a:solidFill>
-                <a:latin typeface="Calibri"/>
-              </a:rPr>
-              <a:t>`S02_Ideacion_Apellido`</a:t>
-            </a:r>
-            <a:r>
-              <a:rPr sz="1600" b="0" i="0">
-                <a:solidFill>
-                  <a:srgbClr val="2B2B2B"/>
-                </a:solidFill>
-                <a:latin typeface="Calibri"/>
-              </a:rPr>
-              <a:t> y subido a </a:t>
-            </a:r>
-            <a:r>
-              <a:rPr sz="1600" b="1" i="0">
-                <a:solidFill>
-                  <a:srgbClr val="2B2B2B"/>
-                </a:solidFill>
-                <a:latin typeface="Calibri"/>
-              </a:rPr>
-              <a:t>CDigital</a:t>
-            </a:r>
-            <a:r>
-              <a:rPr sz="1600" b="0" i="0">
-                <a:solidFill>
-                  <a:srgbClr val="2B2B2B"/>
-                </a:solidFill>
-                <a:latin typeface="Calibri"/>
-              </a:rPr>
               <a:t>.</a:t>
             </a:r>
           </a:p>
-          <a:p>
-            <a:pPr>
-              <a:spcAft>
-                <a:spcPts val="1000"/>
-              </a:spcAft>
-            </a:pPr>
-            <a:r>
-              <a:rPr sz="1600" b="0" i="0">
-                <a:solidFill>
-                  <a:srgbClr val="2B2B2B"/>
-                </a:solidFill>
-                <a:latin typeface="Calibri"/>
-              </a:rPr>
-              <a:t>–   Si alguna casilla queda vacía, todavía tiene trabajo — y sabe exactamente cuál.</a:t>
-            </a:r>
-          </a:p>
-        </p:txBody>
-      </p:sp>
-      <p:sp>
-        <p:nvSpPr>
-          <p:cNvPr id="5" name="TextBox 4"/>
+        </p:txBody>
+      </p:sp>
+      <p:sp>
+        <p:nvSpPr>
+          <p:cNvPr id="6" name="TextBox 5"/>
           <p:cNvSpPr txBox="1"/>
           <p:nvPr/>
         </p:nvSpPr>
@@ -9056,7 +9064,7 @@
                 </a:solidFill>
                 <a:latin typeface="Calibri"/>
               </a:rPr>
-              <a:t>Para continuar — trabajo autónomo</a:t>
+              <a:t>Antes de entregar: revise usted mismo</a:t>
             </a:r>
           </a:p>
         </p:txBody>
@@ -9095,7 +9103,7 @@
                 </a:solidFill>
                 <a:latin typeface="Calibri"/>
               </a:rPr>
-              <a:t>–   </a:t>
+              <a:t>–   ☐ Mi HMW nombra </a:t>
             </a:r>
             <a:r>
               <a:rPr sz="1600" b="1" i="0">
@@ -9104,100 +9112,16 @@
                 </a:solidFill>
                 <a:latin typeface="Calibri"/>
               </a:rPr>
-              <a:t>Tres ideas para llevarse de hoy:</a:t>
-            </a:r>
-          </a:p>
-          <a:p>
-            <a:pPr lvl="1">
-              <a:spcAft>
-                <a:spcPts val="600"/>
-              </a:spcAft>
-            </a:pPr>
-            <a:r>
-              <a:rPr sz="1500" b="0" i="0">
-                <a:solidFill>
-                  <a:srgbClr val="2B2B2B"/>
-                </a:solidFill>
-                <a:latin typeface="Calibri"/>
-              </a:rPr>
-              <a:t>●   1. </a:t>
-            </a:r>
-            <a:r>
-              <a:rPr sz="1500" b="1" i="0">
-                <a:solidFill>
-                  <a:srgbClr val="2B2B2B"/>
-                </a:solidFill>
-                <a:latin typeface="Calibri"/>
-              </a:rPr>
-              <a:t>Primero entiendo, después resuelvo.</a:t>
-            </a:r>
-          </a:p>
-          <a:p>
-            <a:pPr lvl="1">
-              <a:spcAft>
-                <a:spcPts val="600"/>
-              </a:spcAft>
-            </a:pPr>
-            <a:r>
-              <a:rPr sz="1500" b="0" i="0">
-                <a:solidFill>
-                  <a:srgbClr val="2B2B2B"/>
-                </a:solidFill>
-                <a:latin typeface="Calibri"/>
-              </a:rPr>
-              <a:t>●   2. </a:t>
-            </a:r>
-            <a:r>
-              <a:rPr sz="1500" b="1" i="0">
-                <a:solidFill>
-                  <a:srgbClr val="2B2B2B"/>
-                </a:solidFill>
-                <a:latin typeface="Calibri"/>
-              </a:rPr>
-              <a:t>Divergir y converger son momentos distintos</a:t>
-            </a:r>
-            <a:r>
-              <a:rPr sz="1500" b="0" i="0">
-                <a:solidFill>
-                  <a:srgbClr val="2B2B2B"/>
-                </a:solidFill>
-                <a:latin typeface="Calibri"/>
-              </a:rPr>
-              <a:t> — no los mezclo.</a:t>
-            </a:r>
-          </a:p>
-          <a:p>
-            <a:pPr lvl="1">
-              <a:spcAft>
-                <a:spcPts val="600"/>
-              </a:spcAft>
-            </a:pPr>
-            <a:r>
-              <a:rPr sz="1500" b="0" i="0">
-                <a:solidFill>
-                  <a:srgbClr val="2B2B2B"/>
-                </a:solidFill>
-                <a:latin typeface="Calibri"/>
-              </a:rPr>
-              <a:t>●   3. Un buen </a:t>
-            </a:r>
-            <a:r>
-              <a:rPr sz="1500" b="1" i="0">
-                <a:solidFill>
-                  <a:srgbClr val="2B2B2B"/>
-                </a:solidFill>
-                <a:latin typeface="Calibri"/>
-              </a:rPr>
-              <a:t>HMW mira al usuario</a:t>
-            </a:r>
-            <a:r>
-              <a:rPr sz="1500" b="0" i="0">
-                <a:solidFill>
-                  <a:srgbClr val="2B2B2B"/>
-                </a:solidFill>
-                <a:latin typeface="Calibri"/>
-              </a:rPr>
-              <a:t>, no a la tecnología.</a:t>
+              <a:t>una persona concreta</a:t>
+            </a:r>
+            <a:r>
+              <a:rPr sz="1600" b="0" i="0">
+                <a:solidFill>
+                  <a:srgbClr val="2B2B2B"/>
+                </a:solidFill>
+                <a:latin typeface="Calibri"/>
+              </a:rPr>
+              <a:t>, no "los usuarios" ni "la comunidad".</a:t>
             </a:r>
           </a:p>
           <a:p>
@@ -9213,7 +9137,7 @@
                 </a:solidFill>
                 <a:latin typeface="Calibri"/>
               </a:rPr>
-              <a:t>–   </a:t>
+              <a:t>–   ☐ Mi HMW dice </a:t>
             </a:r>
             <a:r>
               <a:rPr sz="1600" b="1" i="0">
@@ -9222,7 +9146,7 @@
                 </a:solidFill>
                 <a:latin typeface="Calibri"/>
               </a:rPr>
-              <a:t>(a)</a:t>
+              <a:t>qué gana</a:t>
             </a:r>
             <a:r>
               <a:rPr sz="1600" b="0" i="0">
@@ -9231,59 +9155,7 @@
                 </a:solidFill>
                 <a:latin typeface="Calibri"/>
               </a:rPr>
-              <a:t> Suban a </a:t>
-            </a:r>
-            <a:r>
-              <a:rPr sz="1600" b="1" i="0">
-                <a:solidFill>
-                  <a:srgbClr val="2B2B2B"/>
-                </a:solidFill>
-                <a:latin typeface="Calibri"/>
-              </a:rPr>
-              <a:t>CDigital</a:t>
-            </a:r>
-            <a:r>
-              <a:rPr sz="1600" b="0" i="0">
-                <a:solidFill>
-                  <a:srgbClr val="2B2B2B"/>
-                </a:solidFill>
-                <a:latin typeface="Calibri"/>
-              </a:rPr>
-              <a:t> su HMW + banco de ideas + boceto como </a:t>
-            </a:r>
-            <a:r>
-              <a:rPr sz="1600" b="1" i="0">
-                <a:solidFill>
-                  <a:srgbClr val="2B2B2B"/>
-                </a:solidFill>
-                <a:latin typeface="Calibri"/>
-              </a:rPr>
-              <a:t>`S02_Ideacion_Apellido`</a:t>
-            </a:r>
-            <a:r>
-              <a:rPr sz="1600" b="0" i="0">
-                <a:solidFill>
-                  <a:srgbClr val="2B2B2B"/>
-                </a:solidFill>
-                <a:latin typeface="Calibri"/>
-              </a:rPr>
-              <a:t>.</a:t>
-            </a:r>
-          </a:p>
-          <a:p>
-            <a:pPr lvl="1">
-              <a:spcAft>
-                <a:spcPts val="600"/>
-              </a:spcAft>
-            </a:pPr>
-            <a:r>
-              <a:rPr sz="1500" b="0" i="0">
-                <a:solidFill>
-                  <a:srgbClr val="2B2B2B"/>
-                </a:solidFill>
-                <a:latin typeface="Calibri"/>
-              </a:rPr>
-              <a:t>●   Plataforma: [URL CDigital — campus del curso pendiente]</a:t>
+              <a:t> esa persona (tiempo, tranquilidad, dinero, seguridad).</a:t>
             </a:r>
           </a:p>
           <a:p>
@@ -9299,7 +9171,7 @@
                 </a:solidFill>
                 <a:latin typeface="Calibri"/>
               </a:rPr>
-              <a:t>–   </a:t>
+              <a:t>–   ☐ Mi HMW </a:t>
             </a:r>
             <a:r>
               <a:rPr sz="1600" b="1" i="0">
@@ -9308,7 +9180,7 @@
                 </a:solidFill>
                 <a:latin typeface="Calibri"/>
               </a:rPr>
-              <a:t>(b)</a:t>
+              <a:t>no</a:t>
             </a:r>
             <a:r>
               <a:rPr sz="1600" b="0" i="0">
@@ -9317,25 +9189,7 @@
                 </a:solidFill>
                 <a:latin typeface="Calibri"/>
               </a:rPr>
-              <a:t> Vuelvan al boceto con </a:t>
-            </a:r>
-            <a:r>
-              <a:rPr sz="1600" b="1" i="0">
-                <a:solidFill>
-                  <a:srgbClr val="2B2B2B"/>
-                </a:solidFill>
-                <a:latin typeface="Calibri"/>
-              </a:rPr>
-              <a:t>una segunda mirada</a:t>
-            </a:r>
-            <a:r>
-              <a:rPr sz="1600" b="0" i="0">
-                <a:solidFill>
-                  <a:srgbClr val="2B2B2B"/>
-                </a:solidFill>
-                <a:latin typeface="Calibri"/>
-              </a:rPr>
-              <a:t> al día siguiente y mejórenlo: casi siempre sobra un paso.</a:t>
+              <a:t> contiene la palabra app, plataforma, sistema, IA ni sensor.</a:t>
             </a:r>
           </a:p>
           <a:p>
@@ -9351,7 +9205,7 @@
                 </a:solidFill>
                 <a:latin typeface="Calibri"/>
               </a:rPr>
-              <a:t>–   </a:t>
+              <a:t>–   ☐ Tengo </a:t>
             </a:r>
             <a:r>
               <a:rPr sz="1600" b="1" i="0">
@@ -9360,7 +9214,7 @@
                 </a:solidFill>
                 <a:latin typeface="Calibri"/>
               </a:rPr>
-              <a:t>(c)</a:t>
+              <a:t>8 ideas o más</a:t>
             </a:r>
             <a:r>
               <a:rPr sz="1600" b="0" i="0">
@@ -9369,7 +9223,7 @@
                 </a:solidFill>
                 <a:latin typeface="Calibri"/>
               </a:rPr>
-              <a:t> Traigan una </a:t>
+              <a:t> escritas, y </a:t>
             </a:r>
             <a:r>
               <a:rPr sz="1600" b="1" i="0">
@@ -9378,7 +9232,7 @@
                 </a:solidFill>
                 <a:latin typeface="Calibri"/>
               </a:rPr>
-              <a:t>clasificación tentativa</a:t>
+              <a:t>al menos una es claramente absurda</a:t>
             </a:r>
             <a:r>
               <a:rPr sz="1600" b="0" i="0">
@@ -9387,23 +9241,177 @@
                 </a:solidFill>
                 <a:latin typeface="Calibri"/>
               </a:rPr>
-              <a:t> de su idea en un tipo de innovación: producto, proceso, organización, marketing o social.</a:t>
-            </a:r>
-          </a:p>
-          <a:p>
-            <a:pPr lvl="1">
+              <a:t> (señal de que sí divergí).</a:t>
+            </a:r>
+          </a:p>
+          <a:p>
+            <a:pPr>
               <a:spcAft>
-                <a:spcPts val="600"/>
+                <a:spcPts val="1000"/>
               </a:spcAft>
             </a:pPr>
             <a:r>
-              <a:rPr sz="1500" b="0" i="0">
-                <a:solidFill>
-                  <a:srgbClr val="2B2B2B"/>
-                </a:solidFill>
-                <a:latin typeface="Calibri"/>
-              </a:rPr>
-              <a:t>●   No importa si se equivocan al clasificar: la próxima sesión les damos el criterio oficial.</a:t>
+              <a:rPr sz="1600" b="0" i="0">
+                <a:solidFill>
+                  <a:srgbClr val="2B2B2B"/>
+                </a:solidFill>
+                <a:latin typeface="Calibri"/>
+              </a:rPr>
+              <a:t>–   ☐ Ninguna idea fue borrada durante la fase de generación.</a:t>
+            </a:r>
+          </a:p>
+          <a:p>
+            <a:pPr>
+              <a:spcAft>
+                <a:spcPts val="1000"/>
+              </a:spcAft>
+            </a:pPr>
+            <a:r>
+              <a:rPr sz="1600" b="0" i="0">
+                <a:solidFill>
+                  <a:srgbClr val="2B2B2B"/>
+                </a:solidFill>
+                <a:latin typeface="Calibri"/>
+              </a:rPr>
+              <a:t>–   ☐ Elegí </a:t>
+            </a:r>
+            <a:r>
+              <a:rPr sz="1600" b="1" i="0">
+                <a:solidFill>
+                  <a:srgbClr val="2B2B2B"/>
+                </a:solidFill>
+                <a:latin typeface="Calibri"/>
+              </a:rPr>
+              <a:t>1 o 2</a:t>
+            </a:r>
+            <a:r>
+              <a:rPr sz="1600" b="0" i="0">
+                <a:solidFill>
+                  <a:srgbClr val="2B2B2B"/>
+                </a:solidFill>
+                <a:latin typeface="Calibri"/>
+              </a:rPr>
+              <a:t> ideas y escribí </a:t>
+            </a:r>
+            <a:r>
+              <a:rPr sz="1600" b="1" i="0">
+                <a:solidFill>
+                  <a:srgbClr val="2B2B2B"/>
+                </a:solidFill>
+                <a:latin typeface="Calibri"/>
+              </a:rPr>
+              <a:t>por qué</a:t>
+            </a:r>
+            <a:r>
+              <a:rPr sz="1600" b="0" i="0">
+                <a:solidFill>
+                  <a:srgbClr val="2B2B2B"/>
+                </a:solidFill>
+                <a:latin typeface="Calibri"/>
+              </a:rPr>
+              <a:t>, nombrando los tres criterios uno por uno.</a:t>
+            </a:r>
+          </a:p>
+          <a:p>
+            <a:pPr>
+              <a:spcAft>
+                <a:spcPts val="1000"/>
+              </a:spcAft>
+            </a:pPr>
+            <a:r>
+              <a:rPr sz="1600" b="0" i="0">
+                <a:solidFill>
+                  <a:srgbClr val="2B2B2B"/>
+                </a:solidFill>
+                <a:latin typeface="Calibri"/>
+              </a:rPr>
+              <a:t>–   ☐ Mi boceto tiene </a:t>
+            </a:r>
+            <a:r>
+              <a:rPr sz="1600" b="1" i="0">
+                <a:solidFill>
+                  <a:srgbClr val="2B2B2B"/>
+                </a:solidFill>
+                <a:latin typeface="Calibri"/>
+              </a:rPr>
+              <a:t>cajas y flechas</a:t>
+            </a:r>
+            <a:r>
+              <a:rPr sz="1600" b="0" i="0">
+                <a:solidFill>
+                  <a:srgbClr val="2B2B2B"/>
+                </a:solidFill>
+                <a:latin typeface="Calibri"/>
+              </a:rPr>
+              <a:t> y se entiende sin que yo lo explique.</a:t>
+            </a:r>
+          </a:p>
+          <a:p>
+            <a:pPr>
+              <a:spcAft>
+                <a:spcPts val="1000"/>
+              </a:spcAft>
+            </a:pPr>
+            <a:r>
+              <a:rPr sz="1600" b="0" i="0">
+                <a:solidFill>
+                  <a:srgbClr val="2B2B2B"/>
+                </a:solidFill>
+                <a:latin typeface="Calibri"/>
+              </a:rPr>
+              <a:t>–   ☐ El archivo está nombrado </a:t>
+            </a:r>
+            <a:r>
+              <a:rPr sz="1600" b="1" i="0">
+                <a:solidFill>
+                  <a:srgbClr val="2B2B2B"/>
+                </a:solidFill>
+                <a:latin typeface="Calibri"/>
+              </a:rPr>
+              <a:t>`S02_Ideacion_Apellido`</a:t>
+            </a:r>
+            <a:r>
+              <a:rPr sz="1600" b="0" i="0">
+                <a:solidFill>
+                  <a:srgbClr val="2B2B2B"/>
+                </a:solidFill>
+                <a:latin typeface="Calibri"/>
+              </a:rPr>
+              <a:t> y subido a </a:t>
+            </a:r>
+            <a:r>
+              <a:rPr sz="1600" b="1" i="0">
+                <a:solidFill>
+                  <a:srgbClr val="2B2B2B"/>
+                </a:solidFill>
+                <a:latin typeface="Calibri"/>
+              </a:rPr>
+              <a:t>CDigital</a:t>
+            </a:r>
+            <a:r>
+              <a:rPr sz="1600" b="0" i="0">
+                <a:solidFill>
+                  <a:srgbClr val="2B2B2B"/>
+                </a:solidFill>
+                <a:latin typeface="Calibri"/>
+              </a:rPr>
+              <a:t>.</a:t>
+            </a:r>
+          </a:p>
+          <a:p>
+            <a:pPr>
+              <a:spcAft>
+                <a:spcPts val="1000"/>
+              </a:spcAft>
+            </a:pPr>
+            <a:r>
+              <a:rPr sz="1600" b="0" i="0">
+                <a:solidFill>
+                  <a:srgbClr val="2B2B2B"/>
+                </a:solidFill>
+                <a:latin typeface="Calibri"/>
+              </a:rPr>
+              <a:t>–   Si alguna casilla queda vacía, todavía tiene trabajo — y sabe exactamente cuál.</a:t>
             </a:r>
           </a:p>
         </p:txBody>
@@ -9543,7 +9551,7 @@
                 </a:solidFill>
                 <a:latin typeface="Calibri"/>
               </a:rPr>
-              <a:t>Para continuar — trabajo autónomo (cont.)</a:t>
+              <a:t>Para continuar — trabajo autónomo</a:t>
             </a:r>
           </a:p>
         </p:txBody>
@@ -9591,8 +9599,108 @@
                 </a:solidFill>
                 <a:latin typeface="Calibri"/>
               </a:rPr>
-              <a:t>Próxima sesión:</a:t>
-            </a:r>
+              <a:t>Tres ideas para llevarse de hoy:</a:t>
+            </a:r>
+          </a:p>
+          <a:p>
+            <a:pPr lvl="1">
+              <a:spcAft>
+                <a:spcPts val="600"/>
+              </a:spcAft>
+            </a:pPr>
+            <a:r>
+              <a:rPr sz="1500" b="0" i="0">
+                <a:solidFill>
+                  <a:srgbClr val="2B2B2B"/>
+                </a:solidFill>
+                <a:latin typeface="Calibri"/>
+              </a:rPr>
+              <a:t>●   1. </a:t>
+            </a:r>
+            <a:r>
+              <a:rPr sz="1500" b="1" i="0">
+                <a:solidFill>
+                  <a:srgbClr val="2B2B2B"/>
+                </a:solidFill>
+                <a:latin typeface="Calibri"/>
+              </a:rPr>
+              <a:t>Primero entiendo, después resuelvo.</a:t>
+            </a:r>
+          </a:p>
+          <a:p>
+            <a:pPr lvl="1">
+              <a:spcAft>
+                <a:spcPts val="600"/>
+              </a:spcAft>
+            </a:pPr>
+            <a:r>
+              <a:rPr sz="1500" b="0" i="0">
+                <a:solidFill>
+                  <a:srgbClr val="2B2B2B"/>
+                </a:solidFill>
+                <a:latin typeface="Calibri"/>
+              </a:rPr>
+              <a:t>●   2. </a:t>
+            </a:r>
+            <a:r>
+              <a:rPr sz="1500" b="1" i="0">
+                <a:solidFill>
+                  <a:srgbClr val="2B2B2B"/>
+                </a:solidFill>
+                <a:latin typeface="Calibri"/>
+              </a:rPr>
+              <a:t>Divergir y converger son momentos distintos</a:t>
+            </a:r>
+            <a:r>
+              <a:rPr sz="1500" b="0" i="0">
+                <a:solidFill>
+                  <a:srgbClr val="2B2B2B"/>
+                </a:solidFill>
+                <a:latin typeface="Calibri"/>
+              </a:rPr>
+              <a:t> — no los mezclo.</a:t>
+            </a:r>
+          </a:p>
+          <a:p>
+            <a:pPr lvl="1">
+              <a:spcAft>
+                <a:spcPts val="600"/>
+              </a:spcAft>
+            </a:pPr>
+            <a:r>
+              <a:rPr sz="1500" b="0" i="0">
+                <a:solidFill>
+                  <a:srgbClr val="2B2B2B"/>
+                </a:solidFill>
+                <a:latin typeface="Calibri"/>
+              </a:rPr>
+              <a:t>●   3. Un buen </a:t>
+            </a:r>
+            <a:r>
+              <a:rPr sz="1500" b="1" i="0">
+                <a:solidFill>
+                  <a:srgbClr val="2B2B2B"/>
+                </a:solidFill>
+                <a:latin typeface="Calibri"/>
+              </a:rPr>
+              <a:t>HMW mira al usuario</a:t>
+            </a:r>
+            <a:r>
+              <a:rPr sz="1500" b="0" i="0">
+                <a:solidFill>
+                  <a:srgbClr val="2B2B2B"/>
+                </a:solidFill>
+                <a:latin typeface="Calibri"/>
+              </a:rPr>
+              <a:t>, no a la tecnología.</a:t>
+            </a:r>
+          </a:p>
+          <a:p>
+            <a:pPr>
+              <a:spcAft>
+                <a:spcPts val="1000"/>
+              </a:spcAft>
+            </a:pPr>
             <a:r>
               <a:rPr sz="1600" b="0" i="0">
                 <a:solidFill>
@@ -9600,7 +9708,7 @@
                 </a:solidFill>
                 <a:latin typeface="Calibri"/>
               </a:rPr>
-              <a:t> Gestión de la innovación con el </a:t>
+              <a:t>–   </a:t>
             </a:r>
             <a:r>
               <a:rPr sz="1600" b="1" i="0">
@@ -9609,7 +9717,7 @@
                 </a:solidFill>
                 <a:latin typeface="Calibri"/>
               </a:rPr>
-              <a:t>Manual de Oslo (OCDE)</a:t>
+              <a:t>(a)</a:t>
             </a:r>
             <a:r>
               <a:rPr sz="1600" b="0" i="0">
@@ -9618,7 +9726,179 @@
                 </a:solidFill>
                 <a:latin typeface="Calibri"/>
               </a:rPr>
-              <a:t> — el idioma común para nombrar lo que están construyendo.</a:t>
+              <a:t> Suban a </a:t>
+            </a:r>
+            <a:r>
+              <a:rPr sz="1600" b="1" i="0">
+                <a:solidFill>
+                  <a:srgbClr val="2B2B2B"/>
+                </a:solidFill>
+                <a:latin typeface="Calibri"/>
+              </a:rPr>
+              <a:t>CDigital</a:t>
+            </a:r>
+            <a:r>
+              <a:rPr sz="1600" b="0" i="0">
+                <a:solidFill>
+                  <a:srgbClr val="2B2B2B"/>
+                </a:solidFill>
+                <a:latin typeface="Calibri"/>
+              </a:rPr>
+              <a:t> su HMW + banco de ideas + boceto como </a:t>
+            </a:r>
+            <a:r>
+              <a:rPr sz="1600" b="1" i="0">
+                <a:solidFill>
+                  <a:srgbClr val="2B2B2B"/>
+                </a:solidFill>
+                <a:latin typeface="Calibri"/>
+              </a:rPr>
+              <a:t>`S02_Ideacion_Apellido`</a:t>
+            </a:r>
+            <a:r>
+              <a:rPr sz="1600" b="0" i="0">
+                <a:solidFill>
+                  <a:srgbClr val="2B2B2B"/>
+                </a:solidFill>
+                <a:latin typeface="Calibri"/>
+              </a:rPr>
+              <a:t>.</a:t>
+            </a:r>
+          </a:p>
+          <a:p>
+            <a:pPr lvl="1">
+              <a:spcAft>
+                <a:spcPts val="600"/>
+              </a:spcAft>
+            </a:pPr>
+            <a:r>
+              <a:rPr sz="1500" b="0" i="0">
+                <a:solidFill>
+                  <a:srgbClr val="2B2B2B"/>
+                </a:solidFill>
+                <a:latin typeface="Calibri"/>
+              </a:rPr>
+              <a:t>●   Plataforma: https://cdigital.cun.edu.co/course/view.php?id=115463</a:t>
+            </a:r>
+          </a:p>
+          <a:p>
+            <a:pPr>
+              <a:spcAft>
+                <a:spcPts val="1000"/>
+              </a:spcAft>
+            </a:pPr>
+            <a:r>
+              <a:rPr sz="1600" b="0" i="0">
+                <a:solidFill>
+                  <a:srgbClr val="2B2B2B"/>
+                </a:solidFill>
+                <a:latin typeface="Calibri"/>
+              </a:rPr>
+              <a:t>–   </a:t>
+            </a:r>
+            <a:r>
+              <a:rPr sz="1600" b="1" i="0">
+                <a:solidFill>
+                  <a:srgbClr val="2B2B2B"/>
+                </a:solidFill>
+                <a:latin typeface="Calibri"/>
+              </a:rPr>
+              <a:t>(b)</a:t>
+            </a:r>
+            <a:r>
+              <a:rPr sz="1600" b="0" i="0">
+                <a:solidFill>
+                  <a:srgbClr val="2B2B2B"/>
+                </a:solidFill>
+                <a:latin typeface="Calibri"/>
+              </a:rPr>
+              <a:t> Vuelvan al boceto con </a:t>
+            </a:r>
+            <a:r>
+              <a:rPr sz="1600" b="1" i="0">
+                <a:solidFill>
+                  <a:srgbClr val="2B2B2B"/>
+                </a:solidFill>
+                <a:latin typeface="Calibri"/>
+              </a:rPr>
+              <a:t>una segunda mirada</a:t>
+            </a:r>
+            <a:r>
+              <a:rPr sz="1600" b="0" i="0">
+                <a:solidFill>
+                  <a:srgbClr val="2B2B2B"/>
+                </a:solidFill>
+                <a:latin typeface="Calibri"/>
+              </a:rPr>
+              <a:t> al día siguiente y mejórenlo: casi siempre sobra un paso.</a:t>
+            </a:r>
+          </a:p>
+          <a:p>
+            <a:pPr>
+              <a:spcAft>
+                <a:spcPts val="1000"/>
+              </a:spcAft>
+            </a:pPr>
+            <a:r>
+              <a:rPr sz="1600" b="0" i="0">
+                <a:solidFill>
+                  <a:srgbClr val="2B2B2B"/>
+                </a:solidFill>
+                <a:latin typeface="Calibri"/>
+              </a:rPr>
+              <a:t>–   </a:t>
+            </a:r>
+            <a:r>
+              <a:rPr sz="1600" b="1" i="0">
+                <a:solidFill>
+                  <a:srgbClr val="2B2B2B"/>
+                </a:solidFill>
+                <a:latin typeface="Calibri"/>
+              </a:rPr>
+              <a:t>(c)</a:t>
+            </a:r>
+            <a:r>
+              <a:rPr sz="1600" b="0" i="0">
+                <a:solidFill>
+                  <a:srgbClr val="2B2B2B"/>
+                </a:solidFill>
+                <a:latin typeface="Calibri"/>
+              </a:rPr>
+              <a:t> Traigan una </a:t>
+            </a:r>
+            <a:r>
+              <a:rPr sz="1600" b="1" i="0">
+                <a:solidFill>
+                  <a:srgbClr val="2B2B2B"/>
+                </a:solidFill>
+                <a:latin typeface="Calibri"/>
+              </a:rPr>
+              <a:t>clasificación tentativa</a:t>
+            </a:r>
+            <a:r>
+              <a:rPr sz="1600" b="0" i="0">
+                <a:solidFill>
+                  <a:srgbClr val="2B2B2B"/>
+                </a:solidFill>
+                <a:latin typeface="Calibri"/>
+              </a:rPr>
+              <a:t> de su idea en un tipo de innovación: producto, proceso, organización, marketing o social.</a:t>
+            </a:r>
+          </a:p>
+          <a:p>
+            <a:pPr lvl="1">
+              <a:spcAft>
+                <a:spcPts val="600"/>
+              </a:spcAft>
+            </a:pPr>
+            <a:r>
+              <a:rPr sz="1500" b="0" i="0">
+                <a:solidFill>
+                  <a:srgbClr val="2B2B2B"/>
+                </a:solidFill>
+                <a:latin typeface="Calibri"/>
+              </a:rPr>
+              <a:t>●   No importa si se equivocan al clasificar: la próxima sesión les damos el criterio oficial.</a:t>
             </a:r>
           </a:p>
         </p:txBody>
@@ -9667,6 +9947,1429 @@
 </file>
 
 <file path=ppt/slides/slide22.xml><?xml version="1.0" encoding="utf-8"?>
+<p:sld xmlns:a="http://schemas.openxmlformats.org/drawingml/2006/main" xmlns:p="http://schemas.openxmlformats.org/presentationml/2006/main" xmlns:r="http://schemas.openxmlformats.org/officeDocument/2006/relationships">
+  <p:cSld>
+    <p:bg>
+      <p:bgPr>
+        <a:solidFill>
+          <a:srgbClr val="FFFFFF"/>
+        </a:solidFill>
+        <a:effectLst/>
+      </p:bgPr>
+    </p:bg>
+    <p:spTree>
+      <p:nvGrpSpPr>
+        <p:cNvPr id="1" name=""/>
+        <p:cNvGrpSpPr/>
+        <p:nvPr/>
+      </p:nvGrpSpPr>
+      <p:grpSpPr/>
+      <p:sp>
+        <p:nvSpPr>
+          <p:cNvPr id="2" name="Rectangle 1"/>
+          <p:cNvSpPr/>
+          <p:nvPr/>
+        </p:nvSpPr>
+        <p:spPr>
+          <a:xfrm>
+            <a:off x="0" y="0"/>
+            <a:ext cx="12191695" cy="1188720"/>
+          </a:xfrm>
+          <a:prstGeom prst="rect">
+            <a:avLst/>
+          </a:prstGeom>
+          <a:solidFill>
+            <a:srgbClr val="0C2340"/>
+          </a:solidFill>
+          <a:ln>
+            <a:noFill/>
+          </a:ln>
+          <a:effectLst/>
+        </p:spPr>
+        <p:style>
+          <a:lnRef idx="1">
+            <a:schemeClr val="accent1"/>
+          </a:lnRef>
+          <a:fillRef idx="3">
+            <a:schemeClr val="accent1"/>
+          </a:fillRef>
+          <a:effectRef idx="2">
+            <a:schemeClr val="accent1"/>
+          </a:effectRef>
+          <a:fontRef idx="minor">
+            <a:schemeClr val="lt1"/>
+          </a:fontRef>
+        </p:style>
+        <p:txBody>
+          <a:bodyPr rtlCol="0" anchor="ctr"/>
+          <a:lstStyle/>
+          <a:p>
+            <a:pPr algn="ctr"/>
+          </a:p>
+        </p:txBody>
+      </p:sp>
+      <p:sp>
+        <p:nvSpPr>
+          <p:cNvPr id="3" name="TextBox 2"/>
+          <p:cNvSpPr txBox="1"/>
+          <p:nvPr/>
+        </p:nvSpPr>
+        <p:spPr>
+          <a:xfrm>
+            <a:off x="640080" y="0"/>
+            <a:ext cx="9082735" cy="1188720"/>
+          </a:xfrm>
+          <a:prstGeom prst="rect">
+            <a:avLst/>
+          </a:prstGeom>
+          <a:noFill/>
+        </p:spPr>
+        <p:txBody>
+          <a:bodyPr wrap="square" anchor="ctr" lIns="0" rIns="0" tIns="0" bIns="0">
+            <a:spAutoFit/>
+          </a:bodyPr>
+          <a:lstStyle/>
+          <a:p>
+            <a:pPr algn="ctr"/>
+            <a:r>
+              <a:rPr sz="2600" b="1" i="0">
+                <a:solidFill>
+                  <a:srgbClr val="FFFFFF"/>
+                </a:solidFill>
+                <a:latin typeface="Calibri"/>
+              </a:rPr>
+              <a:t>Para continuar — trabajo autónomo (cont.)</a:t>
+            </a:r>
+          </a:p>
+        </p:txBody>
+      </p:sp>
+      <p:sp>
+        <p:nvSpPr>
+          <p:cNvPr id="4" name="TextBox 3"/>
+          <p:cNvSpPr txBox="1"/>
+          <p:nvPr/>
+        </p:nvSpPr>
+        <p:spPr>
+          <a:xfrm>
+            <a:off x="640080" y="1691639"/>
+            <a:ext cx="10911535" cy="4617720"/>
+          </a:xfrm>
+          <a:prstGeom prst="rect">
+            <a:avLst/>
+          </a:prstGeom>
+          <a:noFill/>
+        </p:spPr>
+        <p:txBody>
+          <a:bodyPr wrap="square" anchor="t" lIns="0" rIns="0" tIns="0" bIns="0">
+            <a:spAutoFit/>
+          </a:bodyPr>
+          <a:lstStyle/>
+          <a:p>
+            <a:pPr>
+              <a:spcAft>
+                <a:spcPts val="1000"/>
+              </a:spcAft>
+            </a:pPr>
+            <a:r>
+              <a:rPr sz="1600" b="0" i="0">
+                <a:solidFill>
+                  <a:srgbClr val="2B2B2B"/>
+                </a:solidFill>
+                <a:latin typeface="Calibri"/>
+              </a:rPr>
+              <a:t>–   </a:t>
+            </a:r>
+            <a:r>
+              <a:rPr sz="1600" b="1" i="0">
+                <a:solidFill>
+                  <a:srgbClr val="2B2B2B"/>
+                </a:solidFill>
+                <a:latin typeface="Calibri"/>
+              </a:rPr>
+              <a:t>Próxima sesión:</a:t>
+            </a:r>
+            <a:r>
+              <a:rPr sz="1600" b="0" i="0">
+                <a:solidFill>
+                  <a:srgbClr val="2B2B2B"/>
+                </a:solidFill>
+                <a:latin typeface="Calibri"/>
+              </a:rPr>
+              <a:t> Gestión de la innovación con el </a:t>
+            </a:r>
+            <a:r>
+              <a:rPr sz="1600" b="1" i="0">
+                <a:solidFill>
+                  <a:srgbClr val="2B2B2B"/>
+                </a:solidFill>
+                <a:latin typeface="Calibri"/>
+              </a:rPr>
+              <a:t>Manual de Oslo (OCDE)</a:t>
+            </a:r>
+            <a:r>
+              <a:rPr sz="1600" b="0" i="0">
+                <a:solidFill>
+                  <a:srgbClr val="2B2B2B"/>
+                </a:solidFill>
+                <a:latin typeface="Calibri"/>
+              </a:rPr>
+              <a:t> — el idioma común para nombrar lo que están construyendo.</a:t>
+            </a:r>
+          </a:p>
+        </p:txBody>
+      </p:sp>
+      <p:sp>
+        <p:nvSpPr>
+          <p:cNvPr id="5" name="TextBox 4"/>
+          <p:cNvSpPr txBox="1"/>
+          <p:nvPr/>
+        </p:nvSpPr>
+        <p:spPr>
+          <a:xfrm>
+            <a:off x="11094415" y="6446520"/>
+            <a:ext cx="548640" cy="274320"/>
+          </a:xfrm>
+          <a:prstGeom prst="rect">
+            <a:avLst/>
+          </a:prstGeom>
+          <a:noFill/>
+        </p:spPr>
+        <p:txBody>
+          <a:bodyPr wrap="square" anchor="t" lIns="0" rIns="0" tIns="0" bIns="0">
+            <a:spAutoFit/>
+          </a:bodyPr>
+          <a:lstStyle/>
+          <a:p>
+            <a:pPr algn="r"/>
+            <a:r>
+              <a:rPr sz="1000" b="1" i="0">
+                <a:solidFill>
+                  <a:srgbClr val="8F989D"/>
+                </a:solidFill>
+                <a:latin typeface="Calibri"/>
+              </a:rPr>
+              <a:t>22</a:t>
+            </a:r>
+          </a:p>
+        </p:txBody>
+      </p:sp>
+    </p:spTree>
+  </p:cSld>
+  <p:clrMapOvr>
+    <a:masterClrMapping/>
+  </p:clrMapOvr>
+</p:sld>
+</file>
+
+<file path=ppt/slides/slide23.xml><?xml version="1.0" encoding="utf-8"?>
+<p:sld xmlns:a="http://schemas.openxmlformats.org/drawingml/2006/main" xmlns:p="http://schemas.openxmlformats.org/presentationml/2006/main" xmlns:r="http://schemas.openxmlformats.org/officeDocument/2006/relationships">
+  <p:cSld>
+    <p:bg>
+      <p:bgPr>
+        <a:solidFill>
+          <a:srgbClr val="FFFFFF"/>
+        </a:solidFill>
+        <a:effectLst/>
+      </p:bgPr>
+    </p:bg>
+    <p:spTree>
+      <p:nvGrpSpPr>
+        <p:cNvPr id="1" name=""/>
+        <p:cNvGrpSpPr/>
+        <p:nvPr/>
+      </p:nvGrpSpPr>
+      <p:grpSpPr/>
+      <p:sp>
+        <p:nvSpPr>
+          <p:cNvPr id="2" name="Rectangle 1"/>
+          <p:cNvSpPr/>
+          <p:nvPr/>
+        </p:nvSpPr>
+        <p:spPr>
+          <a:xfrm>
+            <a:off x="0" y="0"/>
+            <a:ext cx="12191695" cy="1188720"/>
+          </a:xfrm>
+          <a:prstGeom prst="rect">
+            <a:avLst/>
+          </a:prstGeom>
+          <a:solidFill>
+            <a:srgbClr val="0C2340"/>
+          </a:solidFill>
+          <a:ln>
+            <a:noFill/>
+          </a:ln>
+          <a:effectLst/>
+        </p:spPr>
+        <p:style>
+          <a:lnRef idx="1">
+            <a:schemeClr val="accent1"/>
+          </a:lnRef>
+          <a:fillRef idx="3">
+            <a:schemeClr val="accent1"/>
+          </a:fillRef>
+          <a:effectRef idx="2">
+            <a:schemeClr val="accent1"/>
+          </a:effectRef>
+          <a:fontRef idx="minor">
+            <a:schemeClr val="lt1"/>
+          </a:fontRef>
+        </p:style>
+        <p:txBody>
+          <a:bodyPr rtlCol="0" anchor="ctr"/>
+          <a:lstStyle/>
+          <a:p>
+            <a:pPr algn="ctr"/>
+          </a:p>
+        </p:txBody>
+      </p:sp>
+      <p:sp>
+        <p:nvSpPr>
+          <p:cNvPr id="3" name="TextBox 2"/>
+          <p:cNvSpPr txBox="1"/>
+          <p:nvPr/>
+        </p:nvSpPr>
+        <p:spPr>
+          <a:xfrm>
+            <a:off x="640080" y="0"/>
+            <a:ext cx="9082735" cy="1188720"/>
+          </a:xfrm>
+          <a:prstGeom prst="rect">
+            <a:avLst/>
+          </a:prstGeom>
+          <a:noFill/>
+        </p:spPr>
+        <p:txBody>
+          <a:bodyPr wrap="square" anchor="ctr" lIns="0" rIns="0" tIns="0" bIns="0">
+            <a:spAutoFit/>
+          </a:bodyPr>
+          <a:lstStyle/>
+          <a:p>
+            <a:pPr algn="ctr"/>
+            <a:r>
+              <a:rPr sz="2600" b="1" i="0">
+                <a:solidFill>
+                  <a:srgbClr val="FFFFFF"/>
+                </a:solidFill>
+                <a:latin typeface="Calibri"/>
+              </a:rPr>
+              <a:t>RUTA DE ENTREGABLES DEL CURSO</a:t>
+            </a:r>
+          </a:p>
+        </p:txBody>
+      </p:sp>
+      <p:sp>
+        <p:nvSpPr>
+          <p:cNvPr id="4" name="TextBox 3"/>
+          <p:cNvSpPr txBox="1"/>
+          <p:nvPr/>
+        </p:nvSpPr>
+        <p:spPr>
+          <a:xfrm>
+            <a:off x="640080" y="1280160"/>
+            <a:ext cx="10911535" cy="411480"/>
+          </a:xfrm>
+          <a:prstGeom prst="rect">
+            <a:avLst/>
+          </a:prstGeom>
+          <a:noFill/>
+        </p:spPr>
+        <p:txBody>
+          <a:bodyPr wrap="square" anchor="t" lIns="0" rIns="0" tIns="0" bIns="0">
+            <a:spAutoFit/>
+          </a:bodyPr>
+          <a:lstStyle/>
+          <a:p>
+            <a:pPr algn="ctr"/>
+            <a:r>
+              <a:rPr sz="1500" b="0" i="0">
+                <a:solidFill>
+                  <a:srgbClr val="2B2B2B"/>
+                </a:solidFill>
+                <a:latin typeface="Calibri"/>
+              </a:rPr>
+              <a:t>Sin fechas a propósito: aquí va </a:t>
+            </a:r>
+            <a:r>
+              <a:rPr sz="1500" b="1" i="0">
+                <a:solidFill>
+                  <a:srgbClr val="2B2B2B"/>
+                </a:solidFill>
+                <a:latin typeface="Calibri"/>
+              </a:rPr>
+              <a:t>en qué punto del curso</a:t>
+            </a:r>
+            <a:r>
+              <a:rPr sz="1500" b="0" i="0">
+                <a:solidFill>
+                  <a:srgbClr val="2B2B2B"/>
+                </a:solidFill>
+                <a:latin typeface="Calibri"/>
+              </a:rPr>
+              <a:t> cierra cada ítem · la ventana exacta la fija CDigital</a:t>
+            </a:r>
+          </a:p>
+        </p:txBody>
+      </p:sp>
+      <p:graphicFrame>
+        <p:nvGraphicFramePr>
+          <p:cNvPr id="5" name="Table 4"/>
+          <p:cNvGraphicFramePr>
+            <a:graphicFrameLocks noGrp="1"/>
+          </p:cNvGraphicFramePr>
+          <p:nvPr/>
+        </p:nvGraphicFramePr>
+        <p:xfrm>
+          <a:off x="640080" y="2011679"/>
+          <a:ext cx="10911533" cy="4297680"/>
+        </p:xfrm>
+        <a:graphic>
+          <a:graphicData uri="http://schemas.openxmlformats.org/drawingml/2006/table">
+            <a:tbl>
+              <a:tblPr>
+                <a:tableStyleId>{2D5ABB26-0587-4C30-8999-92F81FD0307C}</a:tableStyleId>
+              </a:tblPr>
+              <a:tblGrid>
+                <a:gridCol w="2659113"/>
+                <a:gridCol w="2659113"/>
+                <a:gridCol w="5593307"/>
+              </a:tblGrid>
+              <a:tr h="477520">
+                <a:tc>
+                  <a:txBody>
+                    <a:bodyPr/>
+                    <a:lstStyle/>
+                    <a:p>
+                      <a:pPr algn="l"/>
+                      <a:r>
+                        <a:rPr sz="1300" b="1" i="0">
+                          <a:solidFill>
+                            <a:srgbClr val="FFFFFF"/>
+                          </a:solidFill>
+                          <a:latin typeface="Calibri"/>
+                        </a:rPr>
+                        <a:t>Cierra en la semana de…</a:t>
+                      </a:r>
+                    </a:p>
+                  </a:txBody>
+                  <a:tcPr anchor="ctr" marL="109728" marR="91440" marT="36576" marB="36576">
+                    <a:solidFill>
+                      <a:srgbClr val="0C2340"/>
+                    </a:solidFill>
+                  </a:tcPr>
+                </a:tc>
+                <a:tc>
+                  <a:txBody>
+                    <a:bodyPr/>
+                    <a:lstStyle/>
+                    <a:p>
+                      <a:pPr algn="l"/>
+                      <a:r>
+                        <a:rPr sz="1300" b="1" i="0">
+                          <a:solidFill>
+                            <a:srgbClr val="FFFFFF"/>
+                          </a:solidFill>
+                          <a:latin typeface="Calibri"/>
+                        </a:rPr>
+                        <a:t>Entregable</a:t>
+                      </a:r>
+                    </a:p>
+                  </a:txBody>
+                  <a:tcPr anchor="ctr" marL="109728" marR="91440" marT="36576" marB="36576">
+                    <a:solidFill>
+                      <a:srgbClr val="0C2340"/>
+                    </a:solidFill>
+                  </a:tcPr>
+                </a:tc>
+                <a:tc>
+                  <a:txBody>
+                    <a:bodyPr/>
+                    <a:lstStyle/>
+                    <a:p>
+                      <a:pPr algn="l"/>
+                      <a:r>
+                        <a:rPr sz="1300" b="1" i="0">
+                          <a:solidFill>
+                            <a:srgbClr val="FFFFFF"/>
+                          </a:solidFill>
+                          <a:latin typeface="Calibri"/>
+                        </a:rPr>
+                        <a:t>Qué debes tener listo</a:t>
+                      </a:r>
+                    </a:p>
+                  </a:txBody>
+                  <a:tcPr anchor="ctr" marL="109728" marR="91440" marT="36576" marB="36576">
+                    <a:solidFill>
+                      <a:srgbClr val="0C2340"/>
+                    </a:solidFill>
+                  </a:tcPr>
+                </a:tc>
+              </a:tr>
+              <a:tr h="477520">
+                <a:tc>
+                  <a:txBody>
+                    <a:bodyPr/>
+                    <a:lstStyle/>
+                    <a:p>
+                      <a:pPr algn="l"/>
+                      <a:r>
+                        <a:rPr sz="1100" b="1" i="0">
+                          <a:solidFill>
+                            <a:srgbClr val="2B2B2B"/>
+                          </a:solidFill>
+                          <a:latin typeface="Calibri"/>
+                        </a:rPr>
+                        <a:t>Sesión 02</a:t>
+                      </a:r>
+                      <a:r>
+                        <a:rPr sz="1100" b="0" i="0">
+                          <a:solidFill>
+                            <a:srgbClr val="2B2B2B"/>
+                          </a:solidFill>
+                          <a:latin typeface="Calibri"/>
+                        </a:rPr>
+                        <a:t> · cierra esta semana</a:t>
+                      </a:r>
+                    </a:p>
+                  </a:txBody>
+                  <a:tcPr anchor="ctr" marL="109728" marR="91440" marT="36576" marB="36576">
+                    <a:solidFill>
+                      <a:srgbClr val="FFFFFF"/>
+                    </a:solidFill>
+                  </a:tcPr>
+                </a:tc>
+                <a:tc>
+                  <a:txBody>
+                    <a:bodyPr/>
+                    <a:lstStyle/>
+                    <a:p>
+                      <a:pPr algn="l"/>
+                      <a:r>
+                        <a:rPr sz="1100" b="1" i="0">
+                          <a:solidFill>
+                            <a:srgbClr val="2B2B2B"/>
+                          </a:solidFill>
+                          <a:latin typeface="Calibri"/>
+                        </a:rPr>
+                        <a:t>Quiz 1</a:t>
+                      </a:r>
+                      <a:r>
+                        <a:rPr sz="1100" b="0" i="0">
+                          <a:solidFill>
+                            <a:srgbClr val="2B2B2B"/>
+                          </a:solidFill>
+                          <a:latin typeface="Calibri"/>
+                        </a:rPr>
+                        <a:t> · Cuestionario · 6%</a:t>
+                      </a:r>
+                    </a:p>
+                  </a:txBody>
+                  <a:tcPr anchor="ctr" marL="109728" marR="91440" marT="36576" marB="36576">
+                    <a:solidFill>
+                      <a:srgbClr val="FFFFFF"/>
+                    </a:solidFill>
+                  </a:tcPr>
+                </a:tc>
+                <a:tc>
+                  <a:txBody>
+                    <a:bodyPr/>
+                    <a:lstStyle/>
+                    <a:p>
+                      <a:pPr algn="l"/>
+                      <a:r>
+                        <a:rPr sz="1100" b="0" i="0">
+                          <a:solidFill>
+                            <a:srgbClr val="2B2B2B"/>
+                          </a:solidFill>
+                          <a:latin typeface="Calibri"/>
+                        </a:rPr>
+                        <a:t>Ten leída la unidad del encuadre: </a:t>
+                      </a:r>
+                      <a:r>
+                        <a:rPr sz="1100" b="1" i="0">
+                          <a:solidFill>
+                            <a:srgbClr val="2B2B2B"/>
+                          </a:solidFill>
+                          <a:latin typeface="Calibri"/>
+                        </a:rPr>
+                        <a:t>Propuesta de Innovación</a:t>
+                      </a:r>
+                      <a:r>
+                        <a:rPr sz="1100" b="0" i="0">
+                          <a:solidFill>
+                            <a:srgbClr val="2B2B2B"/>
+                          </a:solidFill>
+                          <a:latin typeface="Calibri"/>
+                        </a:rPr>
+                        <a:t> e inteligencia emocional.</a:t>
+                      </a:r>
+                    </a:p>
+                  </a:txBody>
+                  <a:tcPr anchor="ctr" marL="109728" marR="91440" marT="36576" marB="36576">
+                    <a:solidFill>
+                      <a:srgbClr val="FFFFFF"/>
+                    </a:solidFill>
+                  </a:tcPr>
+                </a:tc>
+              </a:tr>
+              <a:tr h="477520">
+                <a:tc>
+                  <a:txBody>
+                    <a:bodyPr/>
+                    <a:lstStyle/>
+                    <a:p>
+                      <a:pPr algn="l"/>
+                      <a:r>
+                        <a:rPr sz="1100" b="1" i="0">
+                          <a:solidFill>
+                            <a:srgbClr val="2B2B2B"/>
+                          </a:solidFill>
+                          <a:latin typeface="Calibri"/>
+                        </a:rPr>
+                        <a:t>Sesión 03</a:t>
+                      </a:r>
+                      <a:r>
+                        <a:rPr sz="1100" b="0" i="0">
+                          <a:solidFill>
+                            <a:srgbClr val="2B2B2B"/>
+                          </a:solidFill>
+                          <a:latin typeface="Calibri"/>
+                        </a:rPr>
+                        <a:t> · pendiente</a:t>
+                      </a:r>
+                    </a:p>
+                  </a:txBody>
+                  <a:tcPr anchor="ctr" marL="109728" marR="91440" marT="36576" marB="36576">
+                    <a:solidFill>
+                      <a:srgbClr val="F2F2F2"/>
+                    </a:solidFill>
+                  </a:tcPr>
+                </a:tc>
+                <a:tc>
+                  <a:txBody>
+                    <a:bodyPr/>
+                    <a:lstStyle/>
+                    <a:p>
+                      <a:pPr algn="l"/>
+                      <a:r>
+                        <a:rPr sz="1100" b="1" i="0">
+                          <a:solidFill>
+                            <a:srgbClr val="2B2B2B"/>
+                          </a:solidFill>
+                          <a:latin typeface="Calibri"/>
+                        </a:rPr>
+                        <a:t>Parcial 1</a:t>
+                      </a:r>
+                      <a:r>
+                        <a:rPr sz="1100" b="0" i="0">
+                          <a:solidFill>
+                            <a:srgbClr val="2B2B2B"/>
+                          </a:solidFill>
+                          <a:latin typeface="Calibri"/>
+                        </a:rPr>
+                        <a:t> · Cuestionario · 24%</a:t>
+                      </a:r>
+                    </a:p>
+                  </a:txBody>
+                  <a:tcPr anchor="ctr" marL="109728" marR="91440" marT="36576" marB="36576">
+                    <a:solidFill>
+                      <a:srgbClr val="F2F2F2"/>
+                    </a:solidFill>
+                  </a:tcPr>
+                </a:tc>
+                <a:tc>
+                  <a:txBody>
+                    <a:bodyPr/>
+                    <a:lstStyle/>
+                    <a:p>
+                      <a:pPr algn="l"/>
+                      <a:r>
+                        <a:rPr sz="1100" b="0" i="0">
+                          <a:solidFill>
+                            <a:srgbClr val="2B2B2B"/>
+                          </a:solidFill>
+                          <a:latin typeface="Calibri"/>
+                        </a:rPr>
+                        <a:t>Domina </a:t>
+                      </a:r>
+                      <a:r>
+                        <a:rPr sz="1100" b="1" i="0">
+                          <a:solidFill>
+                            <a:srgbClr val="2B2B2B"/>
+                          </a:solidFill>
+                          <a:latin typeface="Calibri"/>
+                        </a:rPr>
+                        <a:t>Design Thinking</a:t>
+                      </a:r>
+                      <a:r>
+                        <a:rPr sz="1100" b="0" i="0">
+                          <a:solidFill>
+                            <a:srgbClr val="2B2B2B"/>
+                          </a:solidFill>
+                          <a:latin typeface="Calibri"/>
+                        </a:rPr>
+                        <a:t>, dos técnicas de ideación, bloqueadores y ensanchadores.</a:t>
+                      </a:r>
+                    </a:p>
+                  </a:txBody>
+                  <a:tcPr anchor="ctr" marL="109728" marR="91440" marT="36576" marB="36576">
+                    <a:solidFill>
+                      <a:srgbClr val="F2F2F2"/>
+                    </a:solidFill>
+                  </a:tcPr>
+                </a:tc>
+              </a:tr>
+              <a:tr h="477520">
+                <a:tc>
+                  <a:txBody>
+                    <a:bodyPr/>
+                    <a:lstStyle/>
+                    <a:p>
+                      <a:pPr algn="l"/>
+                      <a:r>
+                        <a:rPr sz="1100" b="1" i="0">
+                          <a:solidFill>
+                            <a:srgbClr val="2B2B2B"/>
+                          </a:solidFill>
+                          <a:latin typeface="Calibri"/>
+                        </a:rPr>
+                        <a:t>Sesión 04</a:t>
+                      </a:r>
+                      <a:r>
+                        <a:rPr sz="1100" b="0" i="0">
+                          <a:solidFill>
+                            <a:srgbClr val="2B2B2B"/>
+                          </a:solidFill>
+                          <a:latin typeface="Calibri"/>
+                        </a:rPr>
+                        <a:t> · pendiente</a:t>
+                      </a:r>
+                    </a:p>
+                  </a:txBody>
+                  <a:tcPr anchor="ctr" marL="109728" marR="91440" marT="36576" marB="36576">
+                    <a:solidFill>
+                      <a:srgbClr val="FFFFFF"/>
+                    </a:solidFill>
+                  </a:tcPr>
+                </a:tc>
+                <a:tc>
+                  <a:txBody>
+                    <a:bodyPr/>
+                    <a:lstStyle/>
+                    <a:p>
+                      <a:pPr algn="l"/>
+                      <a:r>
+                        <a:rPr sz="1100" b="1" i="0">
+                          <a:solidFill>
+                            <a:srgbClr val="2B2B2B"/>
+                          </a:solidFill>
+                          <a:latin typeface="Calibri"/>
+                        </a:rPr>
+                        <a:t>Quiz 2</a:t>
+                      </a:r>
+                      <a:r>
+                        <a:rPr sz="1100" b="0" i="0">
+                          <a:solidFill>
+                            <a:srgbClr val="2B2B2B"/>
+                          </a:solidFill>
+                          <a:latin typeface="Calibri"/>
+                        </a:rPr>
+                        <a:t> · Cuestionario · 9%</a:t>
+                      </a:r>
+                    </a:p>
+                  </a:txBody>
+                  <a:tcPr anchor="ctr" marL="109728" marR="91440" marT="36576" marB="36576">
+                    <a:solidFill>
+                      <a:srgbClr val="FFFFFF"/>
+                    </a:solidFill>
+                  </a:tcPr>
+                </a:tc>
+                <a:tc>
+                  <a:txBody>
+                    <a:bodyPr/>
+                    <a:lstStyle/>
+                    <a:p>
+                      <a:pPr algn="l"/>
+                      <a:r>
+                        <a:rPr sz="1100" b="0" i="0">
+                          <a:solidFill>
+                            <a:srgbClr val="2B2B2B"/>
+                          </a:solidFill>
+                          <a:latin typeface="Calibri"/>
+                        </a:rPr>
+                        <a:t>Suma el </a:t>
+                      </a:r>
+                      <a:r>
+                        <a:rPr sz="1100" b="1" i="0">
+                          <a:solidFill>
+                            <a:srgbClr val="2B2B2B"/>
+                          </a:solidFill>
+                          <a:latin typeface="Calibri"/>
+                        </a:rPr>
+                        <a:t>Manual de Oslo</a:t>
+                      </a:r>
+                      <a:r>
+                        <a:rPr sz="1100" b="0" i="0">
+                          <a:solidFill>
+                            <a:srgbClr val="2B2B2B"/>
+                          </a:solidFill>
+                          <a:latin typeface="Calibri"/>
+                        </a:rPr>
+                        <a:t>: qué cuenta como innovación y cómo se gestiona; el curso acumula.</a:t>
+                      </a:r>
+                    </a:p>
+                  </a:txBody>
+                  <a:tcPr anchor="ctr" marL="109728" marR="91440" marT="36576" marB="36576">
+                    <a:solidFill>
+                      <a:srgbClr val="FFFFFF"/>
+                    </a:solidFill>
+                  </a:tcPr>
+                </a:tc>
+              </a:tr>
+              <a:tr h="477520">
+                <a:tc>
+                  <a:txBody>
+                    <a:bodyPr/>
+                    <a:lstStyle/>
+                    <a:p>
+                      <a:pPr algn="l"/>
+                      <a:r>
+                        <a:rPr sz="1100" b="1" i="0">
+                          <a:solidFill>
+                            <a:srgbClr val="2B2B2B"/>
+                          </a:solidFill>
+                          <a:latin typeface="Calibri"/>
+                        </a:rPr>
+                        <a:t>Sesión 05</a:t>
+                      </a:r>
+                      <a:r>
+                        <a:rPr sz="1100" b="0" i="0">
+                          <a:solidFill>
+                            <a:srgbClr val="2B2B2B"/>
+                          </a:solidFill>
+                          <a:latin typeface="Calibri"/>
+                        </a:rPr>
+                        <a:t> · pendiente</a:t>
+                      </a:r>
+                    </a:p>
+                  </a:txBody>
+                  <a:tcPr anchor="ctr" marL="109728" marR="91440" marT="36576" marB="36576">
+                    <a:solidFill>
+                      <a:srgbClr val="F2F2F2"/>
+                    </a:solidFill>
+                  </a:tcPr>
+                </a:tc>
+                <a:tc>
+                  <a:txBody>
+                    <a:bodyPr/>
+                    <a:lstStyle/>
+                    <a:p>
+                      <a:pPr algn="l"/>
+                      <a:r>
+                        <a:rPr sz="1100" b="1" i="0">
+                          <a:solidFill>
+                            <a:srgbClr val="2B2B2B"/>
+                          </a:solidFill>
+                          <a:latin typeface="Calibri"/>
+                        </a:rPr>
+                        <a:t>Parcial 2</a:t>
+                      </a:r>
+                      <a:r>
+                        <a:rPr sz="1100" b="0" i="0">
+                          <a:solidFill>
+                            <a:srgbClr val="2B2B2B"/>
+                          </a:solidFill>
+                          <a:latin typeface="Calibri"/>
+                        </a:rPr>
+                        <a:t> · Cuestionario · 21%</a:t>
+                      </a:r>
+                    </a:p>
+                  </a:txBody>
+                  <a:tcPr anchor="ctr" marL="109728" marR="91440" marT="36576" marB="36576">
+                    <a:solidFill>
+                      <a:srgbClr val="F2F2F2"/>
+                    </a:solidFill>
+                  </a:tcPr>
+                </a:tc>
+                <a:tc>
+                  <a:txBody>
+                    <a:bodyPr/>
+                    <a:lstStyle/>
+                    <a:p>
+                      <a:pPr algn="l"/>
+                      <a:r>
+                        <a:rPr sz="1100" b="0" i="0">
+                          <a:solidFill>
+                            <a:srgbClr val="2B2B2B"/>
+                          </a:solidFill>
+                          <a:latin typeface="Calibri"/>
+                        </a:rPr>
+                        <a:t>Tipifica tu innovación (producto, proceso, organización, marketing, social) y </a:t>
+                      </a:r>
+                      <a:r>
+                        <a:rPr sz="1100" b="1" i="0">
+                          <a:solidFill>
+                            <a:srgbClr val="2B2B2B"/>
+                          </a:solidFill>
+                          <a:latin typeface="Calibri"/>
+                        </a:rPr>
+                        <a:t>justifícala</a:t>
+                      </a:r>
+                      <a:r>
+                        <a:rPr sz="1100" b="0" i="0">
+                          <a:solidFill>
+                            <a:srgbClr val="2B2B2B"/>
+                          </a:solidFill>
+                          <a:latin typeface="Calibri"/>
+                        </a:rPr>
+                        <a:t>.</a:t>
+                      </a:r>
+                    </a:p>
+                  </a:txBody>
+                  <a:tcPr anchor="ctr" marL="109728" marR="91440" marT="36576" marB="36576">
+                    <a:solidFill>
+                      <a:srgbClr val="F2F2F2"/>
+                    </a:solidFill>
+                  </a:tcPr>
+                </a:tc>
+              </a:tr>
+              <a:tr h="477520">
+                <a:tc>
+                  <a:txBody>
+                    <a:bodyPr/>
+                    <a:lstStyle/>
+                    <a:p>
+                      <a:pPr algn="l"/>
+                      <a:r>
+                        <a:rPr sz="1100" b="1" i="0">
+                          <a:solidFill>
+                            <a:srgbClr val="2B2B2B"/>
+                          </a:solidFill>
+                          <a:latin typeface="Calibri"/>
+                        </a:rPr>
+                        <a:t>Sesión 06</a:t>
+                      </a:r>
+                      <a:r>
+                        <a:rPr sz="1100" b="0" i="0">
+                          <a:solidFill>
+                            <a:srgbClr val="2B2B2B"/>
+                          </a:solidFill>
+                          <a:latin typeface="Calibri"/>
+                        </a:rPr>
+                        <a:t> · pendiente</a:t>
+                      </a:r>
+                    </a:p>
+                  </a:txBody>
+                  <a:tcPr anchor="ctr" marL="109728" marR="91440" marT="36576" marB="36576">
+                    <a:solidFill>
+                      <a:srgbClr val="FFFFFF"/>
+                    </a:solidFill>
+                  </a:tcPr>
+                </a:tc>
+                <a:tc>
+                  <a:txBody>
+                    <a:bodyPr/>
+                    <a:lstStyle/>
+                    <a:p>
+                      <a:pPr algn="l"/>
+                      <a:r>
+                        <a:rPr sz="1100" b="1" i="0">
+                          <a:solidFill>
+                            <a:srgbClr val="2B2B2B"/>
+                          </a:solidFill>
+                          <a:latin typeface="Calibri"/>
+                        </a:rPr>
+                        <a:t>ACA Final</a:t>
+                      </a:r>
+                      <a:r>
+                        <a:rPr sz="1100" b="0" i="0">
+                          <a:solidFill>
+                            <a:srgbClr val="2B2B2B"/>
+                          </a:solidFill>
+                          <a:latin typeface="Calibri"/>
+                        </a:rPr>
+                        <a:t> · Tarea · 32,8%</a:t>
+                      </a:r>
+                    </a:p>
+                  </a:txBody>
+                  <a:tcPr anchor="ctr" marL="109728" marR="91440" marT="36576" marB="36576">
+                    <a:solidFill>
+                      <a:srgbClr val="FFFFFF"/>
+                    </a:solidFill>
+                  </a:tcPr>
+                </a:tc>
+                <a:tc>
+                  <a:txBody>
+                    <a:bodyPr/>
+                    <a:lstStyle/>
+                    <a:p>
+                      <a:pPr algn="l"/>
+                      <a:r>
+                        <a:rPr sz="1100" b="0" i="0">
+                          <a:solidFill>
+                            <a:srgbClr val="2B2B2B"/>
+                          </a:solidFill>
+                          <a:latin typeface="Calibri"/>
+                        </a:rPr>
+                        <a:t>Sube la </a:t>
+                      </a:r>
+                      <a:r>
+                        <a:rPr sz="1100" b="1" i="0">
+                          <a:solidFill>
+                            <a:srgbClr val="2B2B2B"/>
+                          </a:solidFill>
+                          <a:latin typeface="Calibri"/>
+                        </a:rPr>
+                        <a:t>propuesta consolidada</a:t>
+                      </a:r>
+                      <a:r>
+                        <a:rPr sz="1100" b="0" i="0">
+                          <a:solidFill>
+                            <a:srgbClr val="2B2B2B"/>
+                          </a:solidFill>
+                          <a:latin typeface="Calibri"/>
+                        </a:rPr>
+                        <a:t>: problema, tipo Oslo, FODA, Canvas, MVP, vigilancia y pitch.</a:t>
+                      </a:r>
+                    </a:p>
+                  </a:txBody>
+                  <a:tcPr anchor="ctr" marL="109728" marR="91440" marT="36576" marB="36576">
+                    <a:solidFill>
+                      <a:srgbClr val="FFFFFF"/>
+                    </a:solidFill>
+                  </a:tcPr>
+                </a:tc>
+              </a:tr>
+              <a:tr h="477520">
+                <a:tc>
+                  <a:txBody>
+                    <a:bodyPr/>
+                    <a:lstStyle/>
+                    <a:p>
+                      <a:pPr algn="l"/>
+                      <a:r>
+                        <a:rPr sz="1100" b="1" i="0">
+                          <a:solidFill>
+                            <a:srgbClr val="2B2B2B"/>
+                          </a:solidFill>
+                          <a:latin typeface="Calibri"/>
+                        </a:rPr>
+                        <a:t>Sesión 06</a:t>
+                      </a:r>
+                      <a:r>
+                        <a:rPr sz="1100" b="0" i="0">
+                          <a:solidFill>
+                            <a:srgbClr val="2B2B2B"/>
+                          </a:solidFill>
+                          <a:latin typeface="Calibri"/>
+                        </a:rPr>
+                        <a:t> · pendiente</a:t>
+                      </a:r>
+                    </a:p>
+                  </a:txBody>
+                  <a:tcPr anchor="ctr" marL="109728" marR="91440" marT="36576" marB="36576">
+                    <a:solidFill>
+                      <a:srgbClr val="F2F2F2"/>
+                    </a:solidFill>
+                  </a:tcPr>
+                </a:tc>
+                <a:tc>
+                  <a:txBody>
+                    <a:bodyPr/>
+                    <a:lstStyle/>
+                    <a:p>
+                      <a:pPr algn="l"/>
+                      <a:r>
+                        <a:rPr sz="1100" b="1" i="0">
+                          <a:solidFill>
+                            <a:srgbClr val="2B2B2B"/>
+                          </a:solidFill>
+                          <a:latin typeface="Calibri"/>
+                        </a:rPr>
+                        <a:t>Quiz 3</a:t>
+                      </a:r>
+                      <a:r>
+                        <a:rPr sz="1100" b="0" i="0">
+                          <a:solidFill>
+                            <a:srgbClr val="2B2B2B"/>
+                          </a:solidFill>
+                          <a:latin typeface="Calibri"/>
+                        </a:rPr>
+                        <a:t> · Cuestionario · 4%</a:t>
+                      </a:r>
+                    </a:p>
+                  </a:txBody>
+                  <a:tcPr anchor="ctr" marL="109728" marR="91440" marT="36576" marB="36576">
+                    <a:solidFill>
+                      <a:srgbClr val="F2F2F2"/>
+                    </a:solidFill>
+                  </a:tcPr>
+                </a:tc>
+                <a:tc>
+                  <a:txBody>
+                    <a:bodyPr/>
+                    <a:lstStyle/>
+                    <a:p>
+                      <a:pPr algn="l"/>
+                      <a:r>
+                        <a:rPr sz="1100" b="0" i="0">
+                          <a:solidFill>
+                            <a:srgbClr val="2B2B2B"/>
+                          </a:solidFill>
+                          <a:latin typeface="Calibri"/>
+                        </a:rPr>
+                        <a:t>Ten claros </a:t>
+                      </a:r>
+                      <a:r>
+                        <a:rPr sz="1100" b="1" i="0">
+                          <a:solidFill>
+                            <a:srgbClr val="2B2B2B"/>
+                          </a:solidFill>
+                          <a:latin typeface="Calibri"/>
+                        </a:rPr>
+                        <a:t>FODA, Canvas y MVP</a:t>
+                      </a:r>
+                      <a:r>
+                        <a:rPr sz="1100" b="0" i="0">
+                          <a:solidFill>
+                            <a:srgbClr val="2B2B2B"/>
+                          </a:solidFill>
+                          <a:latin typeface="Calibri"/>
+                        </a:rPr>
+                        <a:t> (verificable) y para qué sirve la vigilancia tecnológica.</a:t>
+                      </a:r>
+                    </a:p>
+                  </a:txBody>
+                  <a:tcPr anchor="ctr" marL="109728" marR="91440" marT="36576" marB="36576">
+                    <a:solidFill>
+                      <a:srgbClr val="F2F2F2"/>
+                    </a:solidFill>
+                  </a:tcPr>
+                </a:tc>
+              </a:tr>
+              <a:tr h="477520">
+                <a:tc>
+                  <a:txBody>
+                    <a:bodyPr/>
+                    <a:lstStyle/>
+                    <a:p>
+                      <a:pPr algn="l"/>
+                      <a:r>
+                        <a:rPr sz="1100" b="1" i="0">
+                          <a:solidFill>
+                            <a:srgbClr val="2B2B2B"/>
+                          </a:solidFill>
+                          <a:latin typeface="Calibri"/>
+                        </a:rPr>
+                        <a:t>Sesión 07</a:t>
+                      </a:r>
+                      <a:r>
+                        <a:rPr sz="1100" b="0" i="0">
+                          <a:solidFill>
+                            <a:srgbClr val="2B2B2B"/>
+                          </a:solidFill>
+                          <a:latin typeface="Calibri"/>
+                        </a:rPr>
+                        <a:t> · pendiente</a:t>
+                      </a:r>
+                    </a:p>
+                  </a:txBody>
+                  <a:tcPr anchor="ctr" marL="109728" marR="91440" marT="36576" marB="36576">
+                    <a:solidFill>
+                      <a:srgbClr val="FFFFFF"/>
+                    </a:solidFill>
+                  </a:tcPr>
+                </a:tc>
+                <a:tc>
+                  <a:txBody>
+                    <a:bodyPr/>
+                    <a:lstStyle/>
+                    <a:p>
+                      <a:pPr algn="l"/>
+                      <a:r>
+                        <a:rPr sz="1100" b="1" i="0">
+                          <a:solidFill>
+                            <a:srgbClr val="2B2B2B"/>
+                          </a:solidFill>
+                          <a:latin typeface="Calibri"/>
+                        </a:rPr>
+                        <a:t>Autoevaluación</a:t>
+                      </a:r>
+                      <a:r>
+                        <a:rPr sz="1100" b="0" i="0">
+                          <a:solidFill>
+                            <a:srgbClr val="2B2B2B"/>
+                          </a:solidFill>
+                          <a:latin typeface="Calibri"/>
+                        </a:rPr>
+                        <a:t> · Cuestionario · 1,6%</a:t>
+                      </a:r>
+                    </a:p>
+                  </a:txBody>
+                  <a:tcPr anchor="ctr" marL="109728" marR="91440" marT="36576" marB="36576">
+                    <a:solidFill>
+                      <a:srgbClr val="FFFFFF"/>
+                    </a:solidFill>
+                  </a:tcPr>
+                </a:tc>
+                <a:tc>
+                  <a:txBody>
+                    <a:bodyPr/>
+                    <a:lstStyle/>
+                    <a:p>
+                      <a:pPr algn="l"/>
+                      <a:r>
+                        <a:rPr sz="1100" b="0" i="0">
+                          <a:solidFill>
+                            <a:srgbClr val="2B2B2B"/>
+                          </a:solidFill>
+                          <a:latin typeface="Calibri"/>
+                        </a:rPr>
+                        <a:t>Diligénciala tú, y solo tú, </a:t>
+                      </a:r>
+                      <a:r>
+                        <a:rPr sz="1100" b="1" i="0">
+                          <a:solidFill>
+                            <a:srgbClr val="2B2B2B"/>
+                          </a:solidFill>
+                          <a:latin typeface="Calibri"/>
+                        </a:rPr>
+                        <a:t>con honestidad</a:t>
+                      </a:r>
+                      <a:r>
+                        <a:rPr sz="1100" b="0" i="0">
+                          <a:solidFill>
+                            <a:srgbClr val="2B2B2B"/>
+                          </a:solidFill>
+                          <a:latin typeface="Calibri"/>
+                        </a:rPr>
+                        <a:t> sobre tu participación real.</a:t>
+                      </a:r>
+                    </a:p>
+                  </a:txBody>
+                  <a:tcPr anchor="ctr" marL="109728" marR="91440" marT="36576" marB="36576">
+                    <a:solidFill>
+                      <a:srgbClr val="FFFFFF"/>
+                    </a:solidFill>
+                  </a:tcPr>
+                </a:tc>
+              </a:tr>
+              <a:tr h="477520">
+                <a:tc>
+                  <a:txBody>
+                    <a:bodyPr/>
+                    <a:lstStyle/>
+                    <a:p>
+                      <a:pPr algn="l"/>
+                      <a:r>
+                        <a:rPr sz="1100" b="1" i="0">
+                          <a:solidFill>
+                            <a:srgbClr val="2B2B2B"/>
+                          </a:solidFill>
+                          <a:latin typeface="Calibri"/>
+                        </a:rPr>
+                        <a:t>Sesión 07</a:t>
+                      </a:r>
+                      <a:r>
+                        <a:rPr sz="1100" b="0" i="0">
+                          <a:solidFill>
+                            <a:srgbClr val="2B2B2B"/>
+                          </a:solidFill>
+                          <a:latin typeface="Calibri"/>
+                        </a:rPr>
+                        <a:t> · pendiente</a:t>
+                      </a:r>
+                    </a:p>
+                  </a:txBody>
+                  <a:tcPr anchor="ctr" marL="109728" marR="91440" marT="36576" marB="36576">
+                    <a:solidFill>
+                      <a:srgbClr val="F2F2F2"/>
+                    </a:solidFill>
+                  </a:tcPr>
+                </a:tc>
+                <a:tc>
+                  <a:txBody>
+                    <a:bodyPr/>
+                    <a:lstStyle/>
+                    <a:p>
+                      <a:pPr algn="l"/>
+                      <a:r>
+                        <a:rPr sz="1100" b="1" i="0">
+                          <a:solidFill>
+                            <a:srgbClr val="2B2B2B"/>
+                          </a:solidFill>
+                          <a:latin typeface="Calibri"/>
+                        </a:rPr>
+                        <a:t>Coevaluación</a:t>
+                      </a:r>
+                      <a:r>
+                        <a:rPr sz="1100" b="0" i="0">
+                          <a:solidFill>
+                            <a:srgbClr val="2B2B2B"/>
+                          </a:solidFill>
+                          <a:latin typeface="Calibri"/>
+                        </a:rPr>
+                        <a:t> · Foro · 1,6%</a:t>
+                      </a:r>
+                    </a:p>
+                  </a:txBody>
+                  <a:tcPr anchor="ctr" marL="109728" marR="91440" marT="36576" marB="36576">
+                    <a:solidFill>
+                      <a:srgbClr val="F2F2F2"/>
+                    </a:solidFill>
+                  </a:tcPr>
+                </a:tc>
+                <a:tc>
+                  <a:txBody>
+                    <a:bodyPr/>
+                    <a:lstStyle/>
+                    <a:p>
+                      <a:pPr algn="l"/>
+                      <a:r>
+                        <a:rPr sz="1100" b="1" i="0">
+                          <a:solidFill>
+                            <a:srgbClr val="2B2B2B"/>
+                          </a:solidFill>
+                          <a:latin typeface="Calibri"/>
+                        </a:rPr>
+                        <a:t>Publica</a:t>
+                      </a:r>
+                      <a:r>
+                        <a:rPr sz="1100" b="0" i="0">
+                          <a:solidFill>
+                            <a:srgbClr val="2B2B2B"/>
+                          </a:solidFill>
+                          <a:latin typeface="Calibri"/>
+                        </a:rPr>
+                        <a:t> tu aporte: valora hechos del trabajo en equipo, no a las personas.</a:t>
+                      </a:r>
+                    </a:p>
+                  </a:txBody>
+                  <a:tcPr anchor="ctr" marL="109728" marR="91440" marT="36576" marB="36576">
+                    <a:solidFill>
+                      <a:srgbClr val="F2F2F2"/>
+                    </a:solidFill>
+                  </a:tcPr>
+                </a:tc>
+              </a:tr>
+            </a:tbl>
+          </a:graphicData>
+        </a:graphic>
+      </p:graphicFrame>
+      <p:sp>
+        <p:nvSpPr>
+          <p:cNvPr id="6" name="TextBox 5"/>
+          <p:cNvSpPr txBox="1"/>
+          <p:nvPr/>
+        </p:nvSpPr>
+        <p:spPr>
+          <a:xfrm>
+            <a:off x="640080" y="6080760"/>
+            <a:ext cx="10911535" cy="548640"/>
+          </a:xfrm>
+          <a:prstGeom prst="rect">
+            <a:avLst/>
+          </a:prstGeom>
+          <a:noFill/>
+        </p:spPr>
+        <p:txBody>
+          <a:bodyPr wrap="square" anchor="t" lIns="0" rIns="0" tIns="0" bIns="0">
+            <a:spAutoFit/>
+          </a:bodyPr>
+          <a:lstStyle/>
+          <a:p>
+            <a:r>
+              <a:rPr sz="1200" b="0" i="1">
+                <a:solidFill>
+                  <a:srgbClr val="2B2B2B"/>
+                </a:solidFill>
+                <a:latin typeface="Calibri"/>
+              </a:rPr>
+              <a:t>Esta misma tabla va al final de todas las sesiones. La </a:t>
+            </a:r>
+            <a:r>
+              <a:rPr sz="1200" b="1" i="1">
+                <a:solidFill>
+                  <a:srgbClr val="2B2B2B"/>
+                </a:solidFill>
+                <a:latin typeface="Calibri"/>
+              </a:rPr>
+              <a:t>fecha</a:t>
+            </a:r>
+            <a:r>
+              <a:rPr sz="1200" b="0" i="1">
+                <a:solidFill>
+                  <a:srgbClr val="2B2B2B"/>
+                </a:solidFill>
+                <a:latin typeface="Calibri"/>
+              </a:rPr>
+              <a:t> de cada ventana está en el enunciado del ítem (`Clases/Recursos/ACAs/`) y en el aula: si el aula y cualquier otro material se contradicen, </a:t>
+            </a:r>
+            <a:r>
+              <a:rPr sz="1200" b="1" i="1">
+                <a:solidFill>
+                  <a:srgbClr val="2B2B2B"/>
+                </a:solidFill>
+                <a:latin typeface="Calibri"/>
+              </a:rPr>
+              <a:t>manda el aula</a:t>
+            </a:r>
+            <a:r>
+              <a:rPr sz="1200" b="0" i="1">
+                <a:solidFill>
+                  <a:srgbClr val="2B2B2B"/>
+                </a:solidFill>
+                <a:latin typeface="Calibri"/>
+              </a:rPr>
+              <a:t>.</a:t>
+            </a:r>
+          </a:p>
+        </p:txBody>
+      </p:sp>
+      <p:sp>
+        <p:nvSpPr>
+          <p:cNvPr id="7" name="TextBox 6"/>
+          <p:cNvSpPr txBox="1"/>
+          <p:nvPr/>
+        </p:nvSpPr>
+        <p:spPr>
+          <a:xfrm>
+            <a:off x="11094415" y="6446520"/>
+            <a:ext cx="548640" cy="274320"/>
+          </a:xfrm>
+          <a:prstGeom prst="rect">
+            <a:avLst/>
+          </a:prstGeom>
+          <a:noFill/>
+        </p:spPr>
+        <p:txBody>
+          <a:bodyPr wrap="square" anchor="t" lIns="0" rIns="0" tIns="0" bIns="0">
+            <a:spAutoFit/>
+          </a:bodyPr>
+          <a:lstStyle/>
+          <a:p>
+            <a:pPr algn="r"/>
+            <a:r>
+              <a:rPr sz="1000" b="1" i="0">
+                <a:solidFill>
+                  <a:srgbClr val="8F989D"/>
+                </a:solidFill>
+                <a:latin typeface="Calibri"/>
+              </a:rPr>
+              <a:t>23</a:t>
+            </a:r>
+          </a:p>
+        </p:txBody>
+      </p:sp>
+    </p:spTree>
+  </p:cSld>
+  <p:clrMapOvr>
+    <a:masterClrMapping/>
+  </p:clrMapOvr>
+</p:sld>
+</file>
+
+<file path=ppt/slides/slide24.xml><?xml version="1.0" encoding="utf-8"?>
 <p:sld xmlns:a="http://schemas.openxmlformats.org/drawingml/2006/main" xmlns:p="http://schemas.openxmlformats.org/presentationml/2006/main" xmlns:r="http://schemas.openxmlformats.org/officeDocument/2006/relationships">
   <p:cSld>
     <p:bg>
